--- a/dsci551/slides/Meowlytics-DSCI551-Final.pptx
+++ b/dsci551/slides/Meowlytics-DSCI551-Final.pptx
@@ -4,6 +4,9 @@
   <p:sldMasterIdLst>
     <p:sldMasterId id="2147483648" r:id="rId1"/>
   </p:sldMasterIdLst>
+  <p:notesMasterIdLst>
+    <p:notesMasterId r:id="rId15"/>
+  </p:notesMasterIdLst>
   <p:sldIdLst>
     <p:sldId id="256" r:id="rId2"/>
     <p:sldId id="257" r:id="rId3"/>
@@ -19,10 +22,7 @@
     <p:sldId id="267" r:id="rId13"/>
     <p:sldId id="268" r:id="rId14"/>
   </p:sldIdLst>
-  <p:notesMasterIdLst>
-    <p:notesMasterId r:id="rId15"/>
-  </p:notesMasterIdLst>
-  <p:sldSz cx="9144000" cy="5143500"/>
+  <p:sldSz cx="9144000" cy="5143500" type="screen16x9"/>
   <p:notesSz cx="5143500" cy="9144000"/>
   <p:defaultTextStyle>
     <a:lvl1pPr marL="0" algn="l" defTabSz="914400" rtl="0" eaLnBrk="1" latinLnBrk="0" hangingPunct="1">
@@ -116,6 +116,11 @@
       </a:defRPr>
     </a:lvl9pPr>
   </p:defaultTextStyle>
+  <p:extLst>
+    <p:ext uri="{EFAFB233-063F-42B5-8137-9DF3F51BA10A}">
+      <p15:sldGuideLst xmlns:p15="http://schemas.microsoft.com/office/powerpoint/2012/main"/>
+    </p:ext>
+  </p:extLst>
 </p:presentation>
 </file>
 
@@ -141,234 +146,10 @@
           <a:chExt cx="0" cy="0"/>
         </a:xfrm>
       </p:grpSpPr>
-      <p:sp>
-        <p:nvSpPr>
-          <p:cNvPr id="2" name="Header Placeholder 1"/>
-          <p:cNvSpPr>
-            <a:spLocks noGrp="1"/>
-          </p:cNvSpPr>
-          <p:nvPr>
-            <p:ph type="hdr" sz="quarter"/>
-          </p:nvPr>
-        </p:nvSpPr>
-        <p:spPr>
-          <a:xfrm>
-            <a:off x="0" y="0"/>
-            <a:ext cx="2971800" cy="458788"/>
-          </a:xfrm>
-          <a:prstGeom prst="rect">
-            <a:avLst/>
-          </a:prstGeom>
-        </p:spPr>
-        <p:txBody>
-          <a:bodyPr vert="horz" lIns="91440" tIns="45720" rIns="91440" bIns="45720" rtlCol="0"/>
-          <a:lstStyle>
-            <a:lvl1pPr algn="l">
-              <a:defRPr sz="1200"/>
-            </a:lvl1pPr>
-          </a:lstStyle>
-          <a:p>
-            <a:endParaRPr lang="en-US"/>
-          </a:p>
-        </p:txBody>
-      </p:sp>
-      <p:sp>
-        <p:nvSpPr>
-          <p:cNvPr id="3" name="Date Placeholder 2"/>
-          <p:cNvSpPr>
-            <a:spLocks noGrp="1"/>
-          </p:cNvSpPr>
-          <p:nvPr>
-            <p:ph type="dt" idx="1"/>
-          </p:nvPr>
-        </p:nvSpPr>
-        <p:spPr>
-          <a:xfrm>
-            <a:off x="3884613" y="0"/>
-            <a:ext cx="2971800" cy="458788"/>
-          </a:xfrm>
-          <a:prstGeom prst="rect">
-            <a:avLst/>
-          </a:prstGeom>
-        </p:spPr>
-        <p:txBody>
-          <a:bodyPr vert="horz" lIns="91440" tIns="45720" rIns="91440" bIns="45720" rtlCol="0"/>
-          <a:lstStyle>
-            <a:lvl1pPr algn="r">
-              <a:defRPr sz="1200"/>
-            </a:lvl1pPr>
-          </a:lstStyle>
-          <a:p>
-            <a:fld id="{5282F153-3F37-0F45-9E97-73ACFA13230C}" type="datetimeFigureOut">
-              <a:rPr lang="en-US"/>
-              <a:t>7/23/19</a:t>
-            </a:fld>
-            <a:endParaRPr lang="en-US"/>
-          </a:p>
-        </p:txBody>
-      </p:sp>
-      <p:sp>
-        <p:nvSpPr>
-          <p:cNvPr id="4" name="Slide Image Placeholder 3"/>
-          <p:cNvSpPr>
-            <a:spLocks noGrp="1" noRot="1" noChangeAspect="1"/>
-          </p:cNvSpPr>
-          <p:nvPr>
-            <p:ph type="sldImg" idx="2"/>
-          </p:nvPr>
-        </p:nvSpPr>
-        <p:spPr>
-          <a:xfrm>
-            <a:off x="685800" y="1143000"/>
-            <a:ext cx="5486400" cy="3086100"/>
-          </a:xfrm>
-          <a:prstGeom prst="rect">
-            <a:avLst/>
-          </a:prstGeom>
-          <a:noFill/>
-          <a:ln w="12700">
-            <a:solidFill>
-              <a:prstClr val="black"/>
-            </a:solidFill>
-          </a:ln>
-        </p:spPr>
-        <p:txBody>
-          <a:bodyPr vert="horz" lIns="91440" tIns="45720" rIns="91440" bIns="45720" rtlCol="0" anchor="ctr"/>
-          <a:lstStyle/>
-          <a:p>
-            <a:endParaRPr lang="en-US"/>
-          </a:p>
-        </p:txBody>
-      </p:sp>
-      <p:sp>
-        <p:nvSpPr>
-          <p:cNvPr id="5" name="Notes Placeholder 4"/>
-          <p:cNvSpPr>
-            <a:spLocks noGrp="1"/>
-          </p:cNvSpPr>
-          <p:nvPr>
-            <p:ph type="body" sz="quarter" idx="3"/>
-          </p:nvPr>
-        </p:nvSpPr>
-        <p:spPr>
-          <a:xfrm>
-            <a:off x="685800" y="4400550"/>
-            <a:ext cx="5486400" cy="3600450"/>
-          </a:xfrm>
-          <a:prstGeom prst="rect">
-            <a:avLst/>
-          </a:prstGeom>
-        </p:spPr>
-        <p:txBody>
-          <a:bodyPr vert="horz" lIns="91440" tIns="45720" rIns="91440" bIns="45720" rtlCol="0"/>
-          <a:lstStyle/>
-          <a:p>
-            <a:pPr lvl="0"/>
-            <a:r>
-              <a:rPr lang="en-US"/>
-              <a:t>Click to edit Master text styles</a:t>
-            </a:r>
-          </a:p>
-          <a:p>
-            <a:pPr lvl="1"/>
-            <a:r>
-              <a:rPr lang="en-US"/>
-              <a:t>Second level</a:t>
-            </a:r>
-          </a:p>
-          <a:p>
-            <a:pPr lvl="2"/>
-            <a:r>
-              <a:rPr lang="en-US"/>
-              <a:t>Third level</a:t>
-            </a:r>
-          </a:p>
-          <a:p>
-            <a:pPr lvl="3"/>
-            <a:r>
-              <a:rPr lang="en-US"/>
-              <a:t>Fourth level</a:t>
-            </a:r>
-          </a:p>
-          <a:p>
-            <a:pPr lvl="4"/>
-            <a:r>
-              <a:rPr lang="en-US"/>
-              <a:t>Fifth level</a:t>
-            </a:r>
-          </a:p>
-        </p:txBody>
-      </p:sp>
-      <p:sp>
-        <p:nvSpPr>
-          <p:cNvPr id="6" name="Footer Placeholder 5"/>
-          <p:cNvSpPr>
-            <a:spLocks noGrp="1"/>
-          </p:cNvSpPr>
-          <p:nvPr>
-            <p:ph type="ftr" sz="quarter" idx="4"/>
-          </p:nvPr>
-        </p:nvSpPr>
-        <p:spPr>
-          <a:xfrm>
-            <a:off x="0" y="8685213"/>
-            <a:ext cx="2971800" cy="458787"/>
-          </a:xfrm>
-          <a:prstGeom prst="rect">
-            <a:avLst/>
-          </a:prstGeom>
-        </p:spPr>
-        <p:txBody>
-          <a:bodyPr vert="horz" lIns="91440" tIns="45720" rIns="91440" bIns="45720" rtlCol="0" anchor="b"/>
-          <a:lstStyle>
-            <a:lvl1pPr algn="l">
-              <a:defRPr sz="1200"/>
-            </a:lvl1pPr>
-          </a:lstStyle>
-          <a:p>
-            <a:endParaRPr lang="en-US"/>
-          </a:p>
-        </p:txBody>
-      </p:sp>
-      <p:sp>
-        <p:nvSpPr>
-          <p:cNvPr id="7" name="Slide Number Placeholder 6"/>
-          <p:cNvSpPr>
-            <a:spLocks noGrp="1"/>
-          </p:cNvSpPr>
-          <p:nvPr>
-            <p:ph type="sldNum" sz="quarter" idx="5"/>
-          </p:nvPr>
-        </p:nvSpPr>
-        <p:spPr>
-          <a:xfrm>
-            <a:off x="3884613" y="8685213"/>
-            <a:ext cx="2971800" cy="458787"/>
-          </a:xfrm>
-          <a:prstGeom prst="rect">
-            <a:avLst/>
-          </a:prstGeom>
-        </p:spPr>
-        <p:txBody>
-          <a:bodyPr vert="horz" lIns="91440" tIns="45720" rIns="91440" bIns="45720" rtlCol="0" anchor="b"/>
-          <a:lstStyle>
-            <a:lvl1pPr algn="r">
-              <a:defRPr sz="1200"/>
-            </a:lvl1pPr>
-          </a:lstStyle>
-          <a:p>
-            <a:fld id="{CE5E9CC1-C706-0F49-92D6-E571CC5EEA8F}" type="slidenum">
-              <a:rPr lang="en-US"/>
-              <a:t>‹#›</a:t>
-            </a:fld>
-            <a:endParaRPr lang="en-US"/>
-          </a:p>
-        </p:txBody>
-      </p:sp>
     </p:spTree>
     <p:extLst>
       <p:ext uri="{BB962C8B-B14F-4D97-AF65-F5344CB8AC3E}">
-        <p14:creationId xmlns:p14="http://schemas.microsoft.com/office/powerpoint/2010/main" val="1024086991"/>
+        <p14:creationId xmlns:p14="http://schemas.microsoft.com/office/powerpoint/2010/main" val="106235040"/>
       </p:ext>
     </p:extLst>
   </p:cSld>
@@ -512,10 +293,6 @@
           <a:bodyPr/>
           <a:lstStyle/>
           <a:p>
-            <a:r>
-              <a:rPr lang="en-US" dirty="0"/>
-              <a:t/>
-            </a:r>
             <a:endParaRPr lang="en-US" dirty="0"/>
           </a:p>
         </p:txBody>
@@ -600,10 +377,6 @@
           <a:bodyPr/>
           <a:lstStyle/>
           <a:p>
-            <a:r>
-              <a:rPr lang="en-US" dirty="0"/>
-              <a:t/>
-            </a:r>
             <a:endParaRPr lang="en-US" dirty="0"/>
           </a:p>
         </p:txBody>
@@ -688,10 +461,6 @@
           <a:bodyPr/>
           <a:lstStyle/>
           <a:p>
-            <a:r>
-              <a:rPr lang="en-US" dirty="0"/>
-              <a:t/>
-            </a:r>
             <a:endParaRPr lang="en-US" dirty="0"/>
           </a:p>
         </p:txBody>
@@ -776,10 +545,6 @@
           <a:bodyPr/>
           <a:lstStyle/>
           <a:p>
-            <a:r>
-              <a:rPr lang="en-US" dirty="0"/>
-              <a:t/>
-            </a:r>
             <a:endParaRPr lang="en-US" dirty="0"/>
           </a:p>
         </p:txBody>
@@ -864,10 +629,6 @@
           <a:bodyPr/>
           <a:lstStyle/>
           <a:p>
-            <a:r>
-              <a:rPr lang="en-US" dirty="0"/>
-              <a:t/>
-            </a:r>
             <a:endParaRPr lang="en-US" dirty="0"/>
           </a:p>
         </p:txBody>
@@ -952,10 +713,6 @@
           <a:bodyPr/>
           <a:lstStyle/>
           <a:p>
-            <a:r>
-              <a:rPr lang="en-US" dirty="0"/>
-              <a:t/>
-            </a:r>
             <a:endParaRPr lang="en-US" dirty="0"/>
           </a:p>
         </p:txBody>
@@ -1040,10 +797,6 @@
           <a:bodyPr/>
           <a:lstStyle/>
           <a:p>
-            <a:r>
-              <a:rPr lang="en-US" dirty="0"/>
-              <a:t/>
-            </a:r>
             <a:endParaRPr lang="en-US" dirty="0"/>
           </a:p>
         </p:txBody>
@@ -1128,10 +881,6 @@
           <a:bodyPr/>
           <a:lstStyle/>
           <a:p>
-            <a:r>
-              <a:rPr lang="en-US" dirty="0"/>
-              <a:t/>
-            </a:r>
             <a:endParaRPr lang="en-US" dirty="0"/>
           </a:p>
         </p:txBody>
@@ -1216,10 +965,6 @@
           <a:bodyPr/>
           <a:lstStyle/>
           <a:p>
-            <a:r>
-              <a:rPr lang="en-US" dirty="0"/>
-              <a:t/>
-            </a:r>
             <a:endParaRPr lang="en-US" dirty="0"/>
           </a:p>
         </p:txBody>
@@ -1304,10 +1049,6 @@
           <a:bodyPr/>
           <a:lstStyle/>
           <a:p>
-            <a:r>
-              <a:rPr lang="en-US" dirty="0"/>
-              <a:t/>
-            </a:r>
             <a:endParaRPr lang="en-US" dirty="0"/>
           </a:p>
         </p:txBody>
@@ -1392,10 +1133,6 @@
           <a:bodyPr/>
           <a:lstStyle/>
           <a:p>
-            <a:r>
-              <a:rPr lang="en-US" dirty="0"/>
-              <a:t/>
-            </a:r>
             <a:endParaRPr lang="en-US" dirty="0"/>
           </a:p>
         </p:txBody>
@@ -1480,10 +1217,6 @@
           <a:bodyPr/>
           <a:lstStyle/>
           <a:p>
-            <a:r>
-              <a:rPr lang="en-US" dirty="0"/>
-              <a:t/>
-            </a:r>
             <a:endParaRPr lang="en-US" dirty="0"/>
           </a:p>
         </p:txBody>
@@ -1568,10 +1301,6 @@
           <a:bodyPr/>
           <a:lstStyle/>
           <a:p>
-            <a:r>
-              <a:rPr lang="en-US" dirty="0"/>
-              <a:t/>
-            </a:r>
             <a:endParaRPr lang="en-US" dirty="0"/>
           </a:p>
         </p:txBody>
@@ -1645,6 +1374,11 @@
 <file path=ppt/slideMasters/slideMaster1.xml><?xml version="1.0" encoding="utf-8"?>
 <p:sldMaster xmlns:a="http://schemas.openxmlformats.org/drawingml/2006/main" xmlns:r="http://schemas.openxmlformats.org/officeDocument/2006/relationships" xmlns:p="http://schemas.openxmlformats.org/presentationml/2006/main">
   <p:cSld>
+    <p:bg>
+      <p:bgRef idx="1001">
+        <a:schemeClr val="bg1"/>
+      </p:bgRef>
+    </p:bg>
     <p:spTree>
       <p:nvGrpSpPr>
         <p:cNvPr id="1" name=""/>
@@ -1927,6 +1661,7 @@
         <a:solidFill>
           <a:srgbClr val="0F172A"/>
         </a:solidFill>
+        <a:effectLst/>
       </p:bgPr>
     </p:bg>
     <p:spTree>
@@ -1967,6 +1702,13 @@
             <a:prstDash val="solid"/>
           </a:ln>
         </p:spPr>
+        <p:txBody>
+          <a:bodyPr/>
+          <a:lstStyle/>
+          <a:p>
+            <a:endParaRPr lang="zh-CN" altLang="en-US"/>
+          </a:p>
+        </p:txBody>
       </p:sp>
       <p:sp>
         <p:nvSpPr>
@@ -1992,6 +1734,13 @@
             <a:prstDash val="solid"/>
           </a:ln>
         </p:spPr>
+        <p:txBody>
+          <a:bodyPr/>
+          <a:lstStyle/>
+          <a:p>
+            <a:endParaRPr lang="zh-CN" altLang="en-US"/>
+          </a:p>
+        </p:txBody>
       </p:sp>
       <p:sp>
         <p:nvSpPr>
@@ -2017,6 +1766,13 @@
             <a:prstDash val="solid"/>
           </a:ln>
         </p:spPr>
+        <p:txBody>
+          <a:bodyPr/>
+          <a:lstStyle/>
+          <a:p>
+            <a:endParaRPr lang="zh-CN" altLang="en-US"/>
+          </a:p>
+        </p:txBody>
       </p:sp>
       <p:sp>
         <p:nvSpPr>
@@ -2039,7 +1795,7 @@
           <a:bodyPr wrap="square" rtlCol="0" anchor="ctr"/>
           <a:lstStyle/>
           <a:p>
-            <a:pPr algn="l" indent="0" marL="0">
+            <a:pPr marL="0" indent="0" algn="l">
               <a:buNone/>
             </a:pPr>
             <a:r>
@@ -2078,7 +1834,7 @@
           <a:bodyPr wrap="square" rtlCol="0" anchor="ctr"/>
           <a:lstStyle/>
           <a:p>
-            <a:pPr algn="l" indent="0" marL="0">
+            <a:pPr marL="0" indent="0" algn="l">
               <a:buNone/>
             </a:pPr>
             <a:r>
@@ -2117,7 +1873,7 @@
           <a:bodyPr wrap="square" rtlCol="0" anchor="ctr"/>
           <a:lstStyle/>
           <a:p>
-            <a:pPr algn="l" indent="0" marL="0">
+            <a:pPr marL="0" indent="0" algn="l">
               <a:buNone/>
             </a:pPr>
             <a:r>
@@ -2159,6 +1915,13 @@
             <a:prstDash val="solid"/>
           </a:ln>
         </p:spPr>
+        <p:txBody>
+          <a:bodyPr/>
+          <a:lstStyle/>
+          <a:p>
+            <a:endParaRPr lang="zh-CN" altLang="en-US"/>
+          </a:p>
+        </p:txBody>
       </p:sp>
       <p:sp>
         <p:nvSpPr>
@@ -2181,7 +1944,7 @@
           <a:bodyPr wrap="square" rtlCol="0" anchor="ctr"/>
           <a:lstStyle/>
           <a:p>
-            <a:pPr indent="0" marL="0">
+            <a:pPr marL="0" indent="0">
               <a:buNone/>
             </a:pPr>
             <a:r>
@@ -2198,7 +1961,7 @@
             <a:endParaRPr lang="en-US" sz="1300" dirty="0"/>
           </a:p>
           <a:p>
-            <a:pPr indent="0" marL="0">
+            <a:pPr marL="0" indent="0">
               <a:buNone/>
             </a:pPr>
             <a:r>
@@ -2240,6 +2003,13 @@
             <a:prstDash val="solid"/>
           </a:ln>
         </p:spPr>
+        <p:txBody>
+          <a:bodyPr/>
+          <a:lstStyle/>
+          <a:p>
+            <a:endParaRPr lang="zh-CN" altLang="en-US"/>
+          </a:p>
+        </p:txBody>
       </p:sp>
       <p:sp>
         <p:nvSpPr>
@@ -2262,7 +2032,7 @@
           <a:bodyPr wrap="square" lIns="0" tIns="0" rIns="0" bIns="0" rtlCol="0" anchor="ctr"/>
           <a:lstStyle/>
           <a:p>
-            <a:pPr algn="ctr" indent="0" marL="0">
+            <a:pPr marL="0" indent="0" algn="ctr">
               <a:buNone/>
             </a:pPr>
             <a:r>
@@ -2304,6 +2074,13 @@
             <a:prstDash val="solid"/>
           </a:ln>
         </p:spPr>
+        <p:txBody>
+          <a:bodyPr/>
+          <a:lstStyle/>
+          <a:p>
+            <a:endParaRPr lang="zh-CN" altLang="en-US"/>
+          </a:p>
+        </p:txBody>
       </p:sp>
       <p:sp>
         <p:nvSpPr>
@@ -2326,7 +2103,7 @@
           <a:bodyPr wrap="square" lIns="0" tIns="0" rIns="0" bIns="0" rtlCol="0" anchor="ctr"/>
           <a:lstStyle/>
           <a:p>
-            <a:pPr algn="ctr" indent="0" marL="0">
+            <a:pPr marL="0" indent="0" algn="ctr">
               <a:buNone/>
             </a:pPr>
             <a:r>
@@ -2368,6 +2145,13 @@
             <a:prstDash val="solid"/>
           </a:ln>
         </p:spPr>
+        <p:txBody>
+          <a:bodyPr/>
+          <a:lstStyle/>
+          <a:p>
+            <a:endParaRPr lang="zh-CN" altLang="en-US"/>
+          </a:p>
+        </p:txBody>
       </p:sp>
       <p:sp>
         <p:nvSpPr>
@@ -2390,7 +2174,7 @@
           <a:bodyPr wrap="square" lIns="0" tIns="0" rIns="0" bIns="0" rtlCol="0" anchor="ctr"/>
           <a:lstStyle/>
           <a:p>
-            <a:pPr algn="ctr" indent="0" marL="0">
+            <a:pPr marL="0" indent="0" algn="ctr">
               <a:buNone/>
             </a:pPr>
             <a:r>
@@ -2424,6 +2208,7 @@
         <a:solidFill>
           <a:srgbClr val="F8FAFC"/>
         </a:solidFill>
+        <a:effectLst/>
       </p:bgPr>
     </p:bg>
     <p:spTree>
@@ -2464,6 +2249,13 @@
             <a:prstDash val="solid"/>
           </a:ln>
         </p:spPr>
+        <p:txBody>
+          <a:bodyPr/>
+          <a:lstStyle/>
+          <a:p>
+            <a:endParaRPr lang="zh-CN" altLang="en-US"/>
+          </a:p>
+        </p:txBody>
       </p:sp>
       <p:sp>
         <p:nvSpPr>
@@ -2486,7 +2278,7 @@
           <a:bodyPr wrap="square" lIns="0" tIns="0" rIns="0" bIns="0" rtlCol="0" anchor="ctr"/>
           <a:lstStyle/>
           <a:p>
-            <a:pPr indent="0" marL="0">
+            <a:pPr marL="0" indent="0">
               <a:buNone/>
             </a:pPr>
             <a:r>
@@ -2526,6 +2318,13 @@
             <a:prstDash val="solid"/>
           </a:ln>
         </p:spPr>
+        <p:txBody>
+          <a:bodyPr/>
+          <a:lstStyle/>
+          <a:p>
+            <a:endParaRPr lang="zh-CN" altLang="en-US"/>
+          </a:p>
+        </p:txBody>
       </p:sp>
       <p:sp>
         <p:nvSpPr>
@@ -2548,7 +2347,7 @@
           <a:bodyPr wrap="square" rtlCol="0" anchor="ctr"/>
           <a:lstStyle/>
           <a:p>
-            <a:pPr indent="0" marL="0">
+            <a:pPr marL="0" indent="0">
               <a:buNone/>
             </a:pPr>
             <a:r>
@@ -2590,6 +2389,13 @@
             <a:prstDash val="solid"/>
           </a:ln>
         </p:spPr>
+        <p:txBody>
+          <a:bodyPr/>
+          <a:lstStyle/>
+          <a:p>
+            <a:endParaRPr lang="zh-CN" altLang="en-US"/>
+          </a:p>
+        </p:txBody>
       </p:sp>
       <p:sp>
         <p:nvSpPr>
@@ -2615,6 +2421,13 @@
             <a:prstDash val="solid"/>
           </a:ln>
         </p:spPr>
+        <p:txBody>
+          <a:bodyPr/>
+          <a:lstStyle/>
+          <a:p>
+            <a:endParaRPr lang="zh-CN" altLang="en-US"/>
+          </a:p>
+        </p:txBody>
       </p:sp>
       <p:sp>
         <p:nvSpPr>
@@ -2637,7 +2450,7 @@
           <a:bodyPr wrap="square" lIns="0" tIns="0" rIns="0" bIns="0" rtlCol="0" anchor="ctr"/>
           <a:lstStyle/>
           <a:p>
-            <a:pPr indent="0" marL="0">
+            <a:pPr marL="0" indent="0">
               <a:buNone/>
             </a:pPr>
             <a:r>
@@ -2676,7 +2489,7 @@
           <a:bodyPr wrap="square" lIns="0" tIns="0" rIns="0" bIns="0" rtlCol="0" anchor="ctr"/>
           <a:lstStyle/>
           <a:p>
-            <a:pPr algn="r" indent="0" marL="0">
+            <a:pPr marL="0" indent="0" algn="r">
               <a:buNone/>
             </a:pPr>
             <a:r>
@@ -2718,6 +2531,13 @@
             <a:prstDash val="solid"/>
           </a:ln>
         </p:spPr>
+        <p:txBody>
+          <a:bodyPr/>
+          <a:lstStyle/>
+          <a:p>
+            <a:endParaRPr lang="zh-CN" altLang="en-US"/>
+          </a:p>
+        </p:txBody>
       </p:sp>
       <p:sp>
         <p:nvSpPr>
@@ -2740,7 +2560,7 @@
           <a:bodyPr wrap="square" lIns="0" tIns="0" rIns="0" bIns="0" rtlCol="0" anchor="ctr"/>
           <a:lstStyle/>
           <a:p>
-            <a:pPr algn="ctr" indent="0" marL="0">
+            <a:pPr marL="0" indent="0" algn="ctr">
               <a:buNone/>
             </a:pPr>
             <a:r>
@@ -2779,7 +2599,7 @@
           <a:bodyPr wrap="square" rtlCol="0" anchor="t"/>
           <a:lstStyle/>
           <a:p>
-            <a:pPr indent="0" marL="0">
+            <a:pPr marL="0" indent="0">
               <a:buNone/>
             </a:pPr>
             <a:r>
@@ -2821,6 +2641,13 @@
             <a:prstDash val="solid"/>
           </a:ln>
         </p:spPr>
+        <p:txBody>
+          <a:bodyPr/>
+          <a:lstStyle/>
+          <a:p>
+            <a:endParaRPr lang="zh-CN" altLang="en-US"/>
+          </a:p>
+        </p:txBody>
       </p:sp>
       <p:sp>
         <p:nvSpPr>
@@ -2843,7 +2670,7 @@
           <a:bodyPr wrap="square" lIns="0" tIns="0" rIns="0" bIns="0" rtlCol="0" anchor="ctr"/>
           <a:lstStyle/>
           <a:p>
-            <a:pPr algn="ctr" indent="0" marL="0">
+            <a:pPr marL="0" indent="0" algn="ctr">
               <a:buNone/>
             </a:pPr>
             <a:r>
@@ -2882,7 +2709,7 @@
           <a:bodyPr wrap="square" rtlCol="0" anchor="t"/>
           <a:lstStyle/>
           <a:p>
-            <a:pPr indent="0" marL="0">
+            <a:pPr marL="0" indent="0">
               <a:buNone/>
             </a:pPr>
             <a:r>
@@ -2924,6 +2751,13 @@
             <a:prstDash val="solid"/>
           </a:ln>
         </p:spPr>
+        <p:txBody>
+          <a:bodyPr/>
+          <a:lstStyle/>
+          <a:p>
+            <a:endParaRPr lang="zh-CN" altLang="en-US"/>
+          </a:p>
+        </p:txBody>
       </p:sp>
       <p:sp>
         <p:nvSpPr>
@@ -2946,7 +2780,7 @@
           <a:bodyPr wrap="square" lIns="0" tIns="0" rIns="0" bIns="0" rtlCol="0" anchor="ctr"/>
           <a:lstStyle/>
           <a:p>
-            <a:pPr algn="ctr" indent="0" marL="0">
+            <a:pPr marL="0" indent="0" algn="ctr">
               <a:buNone/>
             </a:pPr>
             <a:r>
@@ -2985,7 +2819,7 @@
           <a:bodyPr wrap="square" rtlCol="0" anchor="t"/>
           <a:lstStyle/>
           <a:p>
-            <a:pPr indent="0" marL="0">
+            <a:pPr marL="0" indent="0">
               <a:buNone/>
             </a:pPr>
             <a:r>
@@ -3027,6 +2861,13 @@
             <a:prstDash val="solid"/>
           </a:ln>
         </p:spPr>
+        <p:txBody>
+          <a:bodyPr/>
+          <a:lstStyle/>
+          <a:p>
+            <a:endParaRPr lang="zh-CN" altLang="en-US"/>
+          </a:p>
+        </p:txBody>
       </p:sp>
       <p:sp>
         <p:nvSpPr>
@@ -3049,7 +2890,7 @@
           <a:bodyPr wrap="square" lIns="0" tIns="0" rIns="0" bIns="0" rtlCol="0" anchor="ctr"/>
           <a:lstStyle/>
           <a:p>
-            <a:pPr algn="ctr" indent="0" marL="0">
+            <a:pPr marL="0" indent="0" algn="ctr">
               <a:buNone/>
             </a:pPr>
             <a:r>
@@ -3088,7 +2929,7 @@
           <a:bodyPr wrap="square" rtlCol="0" anchor="t"/>
           <a:lstStyle/>
           <a:p>
-            <a:pPr indent="0" marL="0">
+            <a:pPr marL="0" indent="0">
               <a:buNone/>
             </a:pPr>
             <a:r>
@@ -3130,6 +2971,13 @@
             <a:prstDash val="solid"/>
           </a:ln>
         </p:spPr>
+        <p:txBody>
+          <a:bodyPr/>
+          <a:lstStyle/>
+          <a:p>
+            <a:endParaRPr lang="zh-CN" altLang="en-US"/>
+          </a:p>
+        </p:txBody>
       </p:sp>
       <p:sp>
         <p:nvSpPr>
@@ -3152,7 +3000,7 @@
           <a:bodyPr wrap="square" lIns="0" tIns="0" rIns="0" bIns="0" rtlCol="0" anchor="ctr"/>
           <a:lstStyle/>
           <a:p>
-            <a:pPr algn="ctr" indent="0" marL="0">
+            <a:pPr marL="0" indent="0" algn="ctr">
               <a:buNone/>
             </a:pPr>
             <a:r>
@@ -3191,7 +3039,7 @@
           <a:bodyPr wrap="square" rtlCol="0" anchor="t"/>
           <a:lstStyle/>
           <a:p>
-            <a:pPr indent="0" marL="0">
+            <a:pPr marL="0" indent="0">
               <a:buNone/>
             </a:pPr>
             <a:r>
@@ -3233,6 +3081,13 @@
             <a:prstDash val="solid"/>
           </a:ln>
         </p:spPr>
+        <p:txBody>
+          <a:bodyPr/>
+          <a:lstStyle/>
+          <a:p>
+            <a:endParaRPr lang="zh-CN" altLang="en-US"/>
+          </a:p>
+        </p:txBody>
       </p:sp>
       <p:sp>
         <p:nvSpPr>
@@ -3258,6 +3113,13 @@
             <a:prstDash val="solid"/>
           </a:ln>
         </p:spPr>
+        <p:txBody>
+          <a:bodyPr/>
+          <a:lstStyle/>
+          <a:p>
+            <a:endParaRPr lang="zh-CN" altLang="en-US"/>
+          </a:p>
+        </p:txBody>
       </p:sp>
       <p:sp>
         <p:nvSpPr>
@@ -3280,7 +3142,7 @@
           <a:bodyPr wrap="square" lIns="0" tIns="0" rIns="0" bIns="0" rtlCol="0" anchor="ctr"/>
           <a:lstStyle/>
           <a:p>
-            <a:pPr indent="0" marL="0">
+            <a:pPr marL="0" indent="0">
               <a:buNone/>
             </a:pPr>
             <a:r>
@@ -3319,7 +3181,7 @@
           <a:bodyPr wrap="square" lIns="0" tIns="0" rIns="0" bIns="0" rtlCol="0" anchor="ctr"/>
           <a:lstStyle/>
           <a:p>
-            <a:pPr algn="r" indent="0" marL="0">
+            <a:pPr marL="0" indent="0" algn="r">
               <a:buNone/>
             </a:pPr>
             <a:r>
@@ -3361,6 +3223,13 @@
             <a:prstDash val="solid"/>
           </a:ln>
         </p:spPr>
+        <p:txBody>
+          <a:bodyPr/>
+          <a:lstStyle/>
+          <a:p>
+            <a:endParaRPr lang="zh-CN" altLang="en-US"/>
+          </a:p>
+        </p:txBody>
       </p:sp>
       <p:sp>
         <p:nvSpPr>
@@ -3383,7 +3252,7 @@
           <a:bodyPr wrap="square" lIns="0" tIns="0" rIns="0" bIns="0" rtlCol="0" anchor="ctr"/>
           <a:lstStyle/>
           <a:p>
-            <a:pPr algn="ctr" indent="0" marL="0">
+            <a:pPr marL="0" indent="0" algn="ctr">
               <a:buNone/>
             </a:pPr>
             <a:r>
@@ -3422,7 +3291,7 @@
           <a:bodyPr wrap="square" rtlCol="0" anchor="t"/>
           <a:lstStyle/>
           <a:p>
-            <a:pPr indent="0" marL="0">
+            <a:pPr marL="0" indent="0">
               <a:buNone/>
             </a:pPr>
             <a:r>
@@ -3464,6 +3333,13 @@
             <a:prstDash val="solid"/>
           </a:ln>
         </p:spPr>
+        <p:txBody>
+          <a:bodyPr/>
+          <a:lstStyle/>
+          <a:p>
+            <a:endParaRPr lang="zh-CN" altLang="en-US"/>
+          </a:p>
+        </p:txBody>
       </p:sp>
       <p:sp>
         <p:nvSpPr>
@@ -3486,7 +3362,7 @@
           <a:bodyPr wrap="square" lIns="0" tIns="0" rIns="0" bIns="0" rtlCol="0" anchor="ctr"/>
           <a:lstStyle/>
           <a:p>
-            <a:pPr algn="ctr" indent="0" marL="0">
+            <a:pPr marL="0" indent="0" algn="ctr">
               <a:buNone/>
             </a:pPr>
             <a:r>
@@ -3525,7 +3401,7 @@
           <a:bodyPr wrap="square" rtlCol="0" anchor="t"/>
           <a:lstStyle/>
           <a:p>
-            <a:pPr indent="0" marL="0">
+            <a:pPr marL="0" indent="0">
               <a:buNone/>
             </a:pPr>
             <a:r>
@@ -3567,6 +3443,13 @@
             <a:prstDash val="solid"/>
           </a:ln>
         </p:spPr>
+        <p:txBody>
+          <a:bodyPr/>
+          <a:lstStyle/>
+          <a:p>
+            <a:endParaRPr lang="zh-CN" altLang="en-US"/>
+          </a:p>
+        </p:txBody>
       </p:sp>
       <p:sp>
         <p:nvSpPr>
@@ -3589,7 +3472,7 @@
           <a:bodyPr wrap="square" lIns="0" tIns="0" rIns="0" bIns="0" rtlCol="0" anchor="ctr"/>
           <a:lstStyle/>
           <a:p>
-            <a:pPr algn="ctr" indent="0" marL="0">
+            <a:pPr marL="0" indent="0" algn="ctr">
               <a:buNone/>
             </a:pPr>
             <a:r>
@@ -3628,7 +3511,7 @@
           <a:bodyPr wrap="square" rtlCol="0" anchor="t"/>
           <a:lstStyle/>
           <a:p>
-            <a:pPr indent="0" marL="0">
+            <a:pPr marL="0" indent="0">
               <a:buNone/>
             </a:pPr>
             <a:r>
@@ -3670,6 +3553,13 @@
             <a:prstDash val="solid"/>
           </a:ln>
         </p:spPr>
+        <p:txBody>
+          <a:bodyPr/>
+          <a:lstStyle/>
+          <a:p>
+            <a:endParaRPr lang="zh-CN" altLang="en-US"/>
+          </a:p>
+        </p:txBody>
       </p:sp>
       <p:sp>
         <p:nvSpPr>
@@ -3692,7 +3582,7 @@
           <a:bodyPr wrap="square" lIns="0" tIns="0" rIns="0" bIns="0" rtlCol="0" anchor="ctr"/>
           <a:lstStyle/>
           <a:p>
-            <a:pPr algn="ctr" indent="0" marL="0">
+            <a:pPr marL="0" indent="0" algn="ctr">
               <a:buNone/>
             </a:pPr>
             <a:r>
@@ -3731,7 +3621,7 @@
           <a:bodyPr wrap="square" rtlCol="0" anchor="t"/>
           <a:lstStyle/>
           <a:p>
-            <a:pPr indent="0" marL="0">
+            <a:pPr marL="0" indent="0">
               <a:buNone/>
             </a:pPr>
             <a:r>
@@ -3773,6 +3663,13 @@
             <a:prstDash val="solid"/>
           </a:ln>
         </p:spPr>
+        <p:txBody>
+          <a:bodyPr/>
+          <a:lstStyle/>
+          <a:p>
+            <a:endParaRPr lang="zh-CN" altLang="en-US"/>
+          </a:p>
+        </p:txBody>
       </p:sp>
       <p:sp>
         <p:nvSpPr>
@@ -3795,7 +3692,7 @@
           <a:bodyPr wrap="square" lIns="0" tIns="0" rIns="0" bIns="0" rtlCol="0" anchor="ctr"/>
           <a:lstStyle/>
           <a:p>
-            <a:pPr algn="ctr" indent="0" marL="0">
+            <a:pPr marL="0" indent="0" algn="ctr">
               <a:buNone/>
             </a:pPr>
             <a:r>
@@ -3834,7 +3731,7 @@
           <a:bodyPr wrap="square" rtlCol="0" anchor="t"/>
           <a:lstStyle/>
           <a:p>
-            <a:pPr indent="0" marL="0">
+            <a:pPr marL="0" indent="0">
               <a:buNone/>
             </a:pPr>
             <a:r>
@@ -3876,6 +3773,13 @@
             <a:prstDash val="solid"/>
           </a:ln>
         </p:spPr>
+        <p:txBody>
+          <a:bodyPr/>
+          <a:lstStyle/>
+          <a:p>
+            <a:endParaRPr lang="zh-CN" altLang="en-US"/>
+          </a:p>
+        </p:txBody>
       </p:sp>
       <p:sp>
         <p:nvSpPr>
@@ -3901,6 +3805,13 @@
             <a:prstDash val="solid"/>
           </a:ln>
         </p:spPr>
+        <p:txBody>
+          <a:bodyPr/>
+          <a:lstStyle/>
+          <a:p>
+            <a:endParaRPr lang="zh-CN" altLang="en-US"/>
+          </a:p>
+        </p:txBody>
       </p:sp>
       <p:sp>
         <p:nvSpPr>
@@ -3923,7 +3834,7 @@
           <a:bodyPr wrap="square" lIns="0" tIns="0" rIns="0" bIns="0" rtlCol="0" anchor="ctr"/>
           <a:lstStyle/>
           <a:p>
-            <a:pPr indent="0" marL="0">
+            <a:pPr marL="0" indent="0">
               <a:buNone/>
             </a:pPr>
             <a:r>
@@ -3962,7 +3873,7 @@
           <a:bodyPr wrap="square" lIns="0" tIns="0" rIns="0" bIns="0" rtlCol="0" anchor="ctr"/>
           <a:lstStyle/>
           <a:p>
-            <a:pPr algn="r" indent="0" marL="0">
+            <a:pPr marL="0" indent="0" algn="r">
               <a:buNone/>
             </a:pPr>
             <a:r>
@@ -4004,6 +3915,13 @@
             <a:prstDash val="solid"/>
           </a:ln>
         </p:spPr>
+        <p:txBody>
+          <a:bodyPr/>
+          <a:lstStyle/>
+          <a:p>
+            <a:endParaRPr lang="zh-CN" altLang="en-US"/>
+          </a:p>
+        </p:txBody>
       </p:sp>
       <p:sp>
         <p:nvSpPr>
@@ -4026,7 +3944,7 @@
           <a:bodyPr wrap="square" lIns="0" tIns="0" rIns="0" bIns="0" rtlCol="0" anchor="ctr"/>
           <a:lstStyle/>
           <a:p>
-            <a:pPr algn="ctr" indent="0" marL="0">
+            <a:pPr marL="0" indent="0" algn="ctr">
               <a:buNone/>
             </a:pPr>
             <a:r>
@@ -4065,7 +3983,7 @@
           <a:bodyPr wrap="square" rtlCol="0" anchor="t"/>
           <a:lstStyle/>
           <a:p>
-            <a:pPr indent="0" marL="0">
+            <a:pPr marL="0" indent="0">
               <a:buNone/>
             </a:pPr>
             <a:r>
@@ -4107,6 +4025,13 @@
             <a:prstDash val="solid"/>
           </a:ln>
         </p:spPr>
+        <p:txBody>
+          <a:bodyPr/>
+          <a:lstStyle/>
+          <a:p>
+            <a:endParaRPr lang="zh-CN" altLang="en-US"/>
+          </a:p>
+        </p:txBody>
       </p:sp>
       <p:sp>
         <p:nvSpPr>
@@ -4129,7 +4054,7 @@
           <a:bodyPr wrap="square" lIns="0" tIns="0" rIns="0" bIns="0" rtlCol="0" anchor="ctr"/>
           <a:lstStyle/>
           <a:p>
-            <a:pPr algn="ctr" indent="0" marL="0">
+            <a:pPr marL="0" indent="0" algn="ctr">
               <a:buNone/>
             </a:pPr>
             <a:r>
@@ -4168,7 +4093,7 @@
           <a:bodyPr wrap="square" rtlCol="0" anchor="t"/>
           <a:lstStyle/>
           <a:p>
-            <a:pPr indent="0" marL="0">
+            <a:pPr marL="0" indent="0">
               <a:buNone/>
             </a:pPr>
             <a:r>
@@ -4210,6 +4135,13 @@
             <a:prstDash val="solid"/>
           </a:ln>
         </p:spPr>
+        <p:txBody>
+          <a:bodyPr/>
+          <a:lstStyle/>
+          <a:p>
+            <a:endParaRPr lang="zh-CN" altLang="en-US"/>
+          </a:p>
+        </p:txBody>
       </p:sp>
       <p:sp>
         <p:nvSpPr>
@@ -4232,7 +4164,7 @@
           <a:bodyPr wrap="square" lIns="0" tIns="0" rIns="0" bIns="0" rtlCol="0" anchor="ctr"/>
           <a:lstStyle/>
           <a:p>
-            <a:pPr algn="ctr" indent="0" marL="0">
+            <a:pPr marL="0" indent="0" algn="ctr">
               <a:buNone/>
             </a:pPr>
             <a:r>
@@ -4271,7 +4203,7 @@
           <a:bodyPr wrap="square" rtlCol="0" anchor="t"/>
           <a:lstStyle/>
           <a:p>
-            <a:pPr indent="0" marL="0">
+            <a:pPr marL="0" indent="0">
               <a:buNone/>
             </a:pPr>
             <a:r>
@@ -4313,6 +4245,13 @@
             <a:prstDash val="solid"/>
           </a:ln>
         </p:spPr>
+        <p:txBody>
+          <a:bodyPr/>
+          <a:lstStyle/>
+          <a:p>
+            <a:endParaRPr lang="zh-CN" altLang="en-US"/>
+          </a:p>
+        </p:txBody>
       </p:sp>
       <p:sp>
         <p:nvSpPr>
@@ -4335,7 +4274,7 @@
           <a:bodyPr wrap="square" lIns="0" tIns="0" rIns="0" bIns="0" rtlCol="0" anchor="ctr"/>
           <a:lstStyle/>
           <a:p>
-            <a:pPr algn="ctr" indent="0" marL="0">
+            <a:pPr marL="0" indent="0" algn="ctr">
               <a:buNone/>
             </a:pPr>
             <a:r>
@@ -4374,7 +4313,7 @@
           <a:bodyPr wrap="square" rtlCol="0" anchor="t"/>
           <a:lstStyle/>
           <a:p>
-            <a:pPr indent="0" marL="0">
+            <a:pPr marL="0" indent="0">
               <a:buNone/>
             </a:pPr>
             <a:r>
@@ -4416,6 +4355,13 @@
             <a:prstDash val="solid"/>
           </a:ln>
         </p:spPr>
+        <p:txBody>
+          <a:bodyPr/>
+          <a:lstStyle/>
+          <a:p>
+            <a:endParaRPr lang="zh-CN" altLang="en-US"/>
+          </a:p>
+        </p:txBody>
       </p:sp>
       <p:sp>
         <p:nvSpPr>
@@ -4438,7 +4384,7 @@
           <a:bodyPr wrap="square" lIns="0" tIns="0" rIns="0" bIns="0" rtlCol="0" anchor="ctr"/>
           <a:lstStyle/>
           <a:p>
-            <a:pPr algn="ctr" indent="0" marL="0">
+            <a:pPr marL="0" indent="0" algn="ctr">
               <a:buNone/>
             </a:pPr>
             <a:r>
@@ -4477,7 +4423,7 @@
           <a:bodyPr wrap="square" rtlCol="0" anchor="t"/>
           <a:lstStyle/>
           <a:p>
-            <a:pPr indent="0" marL="0">
+            <a:pPr marL="0" indent="0">
               <a:buNone/>
             </a:pPr>
             <a:r>
@@ -4511,6 +4457,7 @@
         <a:solidFill>
           <a:srgbClr val="F8FAFC"/>
         </a:solidFill>
+        <a:effectLst/>
       </p:bgPr>
     </p:bg>
     <p:spTree>
@@ -4551,6 +4498,13 @@
             <a:prstDash val="solid"/>
           </a:ln>
         </p:spPr>
+        <p:txBody>
+          <a:bodyPr/>
+          <a:lstStyle/>
+          <a:p>
+            <a:endParaRPr lang="zh-CN" altLang="en-US"/>
+          </a:p>
+        </p:txBody>
       </p:sp>
       <p:sp>
         <p:nvSpPr>
@@ -4573,7 +4527,7 @@
           <a:bodyPr wrap="square" lIns="0" tIns="0" rIns="0" bIns="0" rtlCol="0" anchor="ctr"/>
           <a:lstStyle/>
           <a:p>
-            <a:pPr indent="0" marL="0">
+            <a:pPr marL="0" indent="0">
               <a:buNone/>
             </a:pPr>
             <a:r>
@@ -4613,6 +4567,13 @@
             <a:prstDash val="solid"/>
           </a:ln>
         </p:spPr>
+        <p:txBody>
+          <a:bodyPr/>
+          <a:lstStyle/>
+          <a:p>
+            <a:endParaRPr lang="zh-CN" altLang="en-US"/>
+          </a:p>
+        </p:txBody>
       </p:sp>
       <p:sp>
         <p:nvSpPr>
@@ -4638,6 +4599,13 @@
             <a:prstDash val="solid"/>
           </a:ln>
         </p:spPr>
+        <p:txBody>
+          <a:bodyPr/>
+          <a:lstStyle/>
+          <a:p>
+            <a:endParaRPr lang="zh-CN" altLang="en-US"/>
+          </a:p>
+        </p:txBody>
       </p:sp>
       <p:sp>
         <p:nvSpPr>
@@ -4660,7 +4628,7 @@
           <a:bodyPr wrap="square" lIns="0" tIns="0" rIns="0" bIns="0" rtlCol="0" anchor="ctr"/>
           <a:lstStyle/>
           <a:p>
-            <a:pPr algn="ctr" indent="0" marL="0">
+            <a:pPr marL="0" indent="0" algn="ctr">
               <a:buNone/>
             </a:pPr>
             <a:r>
@@ -4702,6 +4670,13 @@
             <a:prstDash val="solid"/>
           </a:ln>
         </p:spPr>
+        <p:txBody>
+          <a:bodyPr/>
+          <a:lstStyle/>
+          <a:p>
+            <a:endParaRPr lang="zh-CN" altLang="en-US"/>
+          </a:p>
+        </p:txBody>
       </p:sp>
       <p:sp>
         <p:nvSpPr>
@@ -4724,7 +4699,7 @@
           <a:bodyPr wrap="square" lIns="0" tIns="0" rIns="0" bIns="0" rtlCol="0" anchor="ctr"/>
           <a:lstStyle/>
           <a:p>
-            <a:pPr algn="ctr" indent="0" marL="0">
+            <a:pPr marL="0" indent="0" algn="ctr">
               <a:buNone/>
             </a:pPr>
             <a:r>
@@ -4766,6 +4741,13 @@
             <a:prstDash val="solid"/>
           </a:ln>
         </p:spPr>
+        <p:txBody>
+          <a:bodyPr/>
+          <a:lstStyle/>
+          <a:p>
+            <a:endParaRPr lang="zh-CN" altLang="en-US"/>
+          </a:p>
+        </p:txBody>
       </p:sp>
       <p:sp>
         <p:nvSpPr>
@@ -4788,7 +4770,7 @@
           <a:bodyPr wrap="square" lIns="0" tIns="0" rIns="0" bIns="0" rtlCol="0" anchor="ctr"/>
           <a:lstStyle/>
           <a:p>
-            <a:pPr algn="ctr" indent="0" marL="0">
+            <a:pPr marL="0" indent="0" algn="ctr">
               <a:buNone/>
             </a:pPr>
             <a:r>
@@ -4830,6 +4812,13 @@
             <a:prstDash val="solid"/>
           </a:ln>
         </p:spPr>
+        <p:txBody>
+          <a:bodyPr/>
+          <a:lstStyle/>
+          <a:p>
+            <a:endParaRPr lang="zh-CN" altLang="en-US"/>
+          </a:p>
+        </p:txBody>
       </p:sp>
       <p:sp>
         <p:nvSpPr>
@@ -4852,7 +4841,7 @@
           <a:bodyPr wrap="square" lIns="0" tIns="0" rIns="0" bIns="0" rtlCol="0" anchor="ctr"/>
           <a:lstStyle/>
           <a:p>
-            <a:pPr algn="ctr" indent="0" marL="0">
+            <a:pPr marL="0" indent="0" algn="ctr">
               <a:buNone/>
             </a:pPr>
             <a:r>
@@ -4894,6 +4883,13 @@
             <a:prstDash val="solid"/>
           </a:ln>
         </p:spPr>
+        <p:txBody>
+          <a:bodyPr/>
+          <a:lstStyle/>
+          <a:p>
+            <a:endParaRPr lang="zh-CN" altLang="en-US"/>
+          </a:p>
+        </p:txBody>
       </p:sp>
       <p:sp>
         <p:nvSpPr>
@@ -4916,7 +4912,7 @@
           <a:bodyPr wrap="square" rtlCol="0" anchor="ctr"/>
           <a:lstStyle/>
           <a:p>
-            <a:pPr indent="0" marL="0">
+            <a:pPr marL="0" indent="0">
               <a:buNone/>
             </a:pPr>
             <a:r>
@@ -4958,6 +4954,13 @@
             <a:prstDash val="solid"/>
           </a:ln>
         </p:spPr>
+        <p:txBody>
+          <a:bodyPr/>
+          <a:lstStyle/>
+          <a:p>
+            <a:endParaRPr lang="zh-CN" altLang="en-US"/>
+          </a:p>
+        </p:txBody>
       </p:sp>
       <p:sp>
         <p:nvSpPr>
@@ -4980,7 +4983,7 @@
           <a:bodyPr wrap="square" rtlCol="0" anchor="ctr"/>
           <a:lstStyle/>
           <a:p>
-            <a:pPr indent="0" marL="0">
+            <a:pPr marL="0" indent="0">
               <a:buNone/>
             </a:pPr>
             <a:r>
@@ -5022,6 +5025,13 @@
             <a:prstDash val="solid"/>
           </a:ln>
         </p:spPr>
+        <p:txBody>
+          <a:bodyPr/>
+          <a:lstStyle/>
+          <a:p>
+            <a:endParaRPr lang="zh-CN" altLang="en-US"/>
+          </a:p>
+        </p:txBody>
       </p:sp>
       <p:sp>
         <p:nvSpPr>
@@ -5044,7 +5054,7 @@
           <a:bodyPr wrap="square" rtlCol="0" anchor="ctr"/>
           <a:lstStyle/>
           <a:p>
-            <a:pPr indent="0" marL="0">
+            <a:pPr marL="0" indent="0">
               <a:buNone/>
             </a:pPr>
             <a:r>
@@ -5086,6 +5096,13 @@
             <a:prstDash val="solid"/>
           </a:ln>
         </p:spPr>
+        <p:txBody>
+          <a:bodyPr/>
+          <a:lstStyle/>
+          <a:p>
+            <a:endParaRPr lang="zh-CN" altLang="en-US"/>
+          </a:p>
+        </p:txBody>
       </p:sp>
       <p:sp>
         <p:nvSpPr>
@@ -5108,7 +5125,7 @@
           <a:bodyPr wrap="square" rtlCol="0" anchor="ctr"/>
           <a:lstStyle/>
           <a:p>
-            <a:pPr indent="0" marL="0">
+            <a:pPr marL="0" indent="0">
               <a:buNone/>
             </a:pPr>
             <a:r>
@@ -5150,6 +5167,13 @@
             <a:prstDash val="solid"/>
           </a:ln>
         </p:spPr>
+        <p:txBody>
+          <a:bodyPr/>
+          <a:lstStyle/>
+          <a:p>
+            <a:endParaRPr lang="zh-CN" altLang="en-US"/>
+          </a:p>
+        </p:txBody>
       </p:sp>
       <p:sp>
         <p:nvSpPr>
@@ -5172,7 +5196,7 @@
           <a:bodyPr wrap="square" rtlCol="0" anchor="ctr"/>
           <a:lstStyle/>
           <a:p>
-            <a:pPr indent="0" marL="0">
+            <a:pPr marL="0" indent="0">
               <a:buNone/>
             </a:pPr>
             <a:r>
@@ -5214,6 +5238,13 @@
             <a:prstDash val="solid"/>
           </a:ln>
         </p:spPr>
+        <p:txBody>
+          <a:bodyPr/>
+          <a:lstStyle/>
+          <a:p>
+            <a:endParaRPr lang="zh-CN" altLang="en-US"/>
+          </a:p>
+        </p:txBody>
       </p:sp>
       <p:sp>
         <p:nvSpPr>
@@ -5236,7 +5267,7 @@
           <a:bodyPr wrap="square" rtlCol="0" anchor="ctr"/>
           <a:lstStyle/>
           <a:p>
-            <a:pPr indent="0" marL="0">
+            <a:pPr marL="0" indent="0">
               <a:buNone/>
             </a:pPr>
             <a:r>
@@ -5278,6 +5309,13 @@
             <a:prstDash val="solid"/>
           </a:ln>
         </p:spPr>
+        <p:txBody>
+          <a:bodyPr/>
+          <a:lstStyle/>
+          <a:p>
+            <a:endParaRPr lang="zh-CN" altLang="en-US"/>
+          </a:p>
+        </p:txBody>
       </p:sp>
       <p:sp>
         <p:nvSpPr>
@@ -5300,7 +5338,7 @@
           <a:bodyPr wrap="square" rtlCol="0" anchor="ctr"/>
           <a:lstStyle/>
           <a:p>
-            <a:pPr indent="0" marL="0">
+            <a:pPr marL="0" indent="0">
               <a:buNone/>
             </a:pPr>
             <a:r>
@@ -5342,6 +5380,13 @@
             <a:prstDash val="solid"/>
           </a:ln>
         </p:spPr>
+        <p:txBody>
+          <a:bodyPr/>
+          <a:lstStyle/>
+          <a:p>
+            <a:endParaRPr lang="zh-CN" altLang="en-US"/>
+          </a:p>
+        </p:txBody>
       </p:sp>
       <p:sp>
         <p:nvSpPr>
@@ -5364,7 +5409,7 @@
           <a:bodyPr wrap="square" rtlCol="0" anchor="ctr"/>
           <a:lstStyle/>
           <a:p>
-            <a:pPr indent="0" marL="0">
+            <a:pPr marL="0" indent="0">
               <a:buNone/>
             </a:pPr>
             <a:r>
@@ -5406,6 +5451,13 @@
             <a:prstDash val="solid"/>
           </a:ln>
         </p:spPr>
+        <p:txBody>
+          <a:bodyPr/>
+          <a:lstStyle/>
+          <a:p>
+            <a:endParaRPr lang="zh-CN" altLang="en-US"/>
+          </a:p>
+        </p:txBody>
       </p:sp>
       <p:sp>
         <p:nvSpPr>
@@ -5428,7 +5480,7 @@
           <a:bodyPr wrap="square" rtlCol="0" anchor="ctr"/>
           <a:lstStyle/>
           <a:p>
-            <a:pPr indent="0" marL="0">
+            <a:pPr marL="0" indent="0">
               <a:buNone/>
             </a:pPr>
             <a:r>
@@ -5470,6 +5522,13 @@
             <a:prstDash val="solid"/>
           </a:ln>
         </p:spPr>
+        <p:txBody>
+          <a:bodyPr/>
+          <a:lstStyle/>
+          <a:p>
+            <a:endParaRPr lang="zh-CN" altLang="en-US"/>
+          </a:p>
+        </p:txBody>
       </p:sp>
       <p:sp>
         <p:nvSpPr>
@@ -5492,7 +5551,7 @@
           <a:bodyPr wrap="square" rtlCol="0" anchor="ctr"/>
           <a:lstStyle/>
           <a:p>
-            <a:pPr indent="0" marL="0">
+            <a:pPr marL="0" indent="0">
               <a:buNone/>
             </a:pPr>
             <a:r>
@@ -5534,6 +5593,13 @@
             <a:prstDash val="solid"/>
           </a:ln>
         </p:spPr>
+        <p:txBody>
+          <a:bodyPr/>
+          <a:lstStyle/>
+          <a:p>
+            <a:endParaRPr lang="zh-CN" altLang="en-US"/>
+          </a:p>
+        </p:txBody>
       </p:sp>
       <p:sp>
         <p:nvSpPr>
@@ -5556,7 +5622,7 @@
           <a:bodyPr wrap="square" rtlCol="0" anchor="ctr"/>
           <a:lstStyle/>
           <a:p>
-            <a:pPr indent="0" marL="0">
+            <a:pPr marL="0" indent="0">
               <a:buNone/>
             </a:pPr>
             <a:r>
@@ -5598,6 +5664,13 @@
             <a:prstDash val="solid"/>
           </a:ln>
         </p:spPr>
+        <p:txBody>
+          <a:bodyPr/>
+          <a:lstStyle/>
+          <a:p>
+            <a:endParaRPr lang="zh-CN" altLang="en-US"/>
+          </a:p>
+        </p:txBody>
       </p:sp>
       <p:sp>
         <p:nvSpPr>
@@ -5620,7 +5693,7 @@
           <a:bodyPr wrap="square" rtlCol="0" anchor="ctr"/>
           <a:lstStyle/>
           <a:p>
-            <a:pPr indent="0" marL="0">
+            <a:pPr marL="0" indent="0">
               <a:buNone/>
             </a:pPr>
             <a:r>
@@ -5662,6 +5735,13 @@
             <a:prstDash val="solid"/>
           </a:ln>
         </p:spPr>
+        <p:txBody>
+          <a:bodyPr/>
+          <a:lstStyle/>
+          <a:p>
+            <a:endParaRPr lang="zh-CN" altLang="en-US"/>
+          </a:p>
+        </p:txBody>
       </p:sp>
       <p:sp>
         <p:nvSpPr>
@@ -5684,7 +5764,7 @@
           <a:bodyPr wrap="square" rtlCol="0" anchor="ctr"/>
           <a:lstStyle/>
           <a:p>
-            <a:pPr indent="0" marL="0">
+            <a:pPr marL="0" indent="0">
               <a:buNone/>
             </a:pPr>
             <a:r>
@@ -5726,6 +5806,13 @@
             <a:prstDash val="solid"/>
           </a:ln>
         </p:spPr>
+        <p:txBody>
+          <a:bodyPr/>
+          <a:lstStyle/>
+          <a:p>
+            <a:endParaRPr lang="zh-CN" altLang="en-US"/>
+          </a:p>
+        </p:txBody>
       </p:sp>
       <p:sp>
         <p:nvSpPr>
@@ -5748,7 +5835,7 @@
           <a:bodyPr wrap="square" rtlCol="0" anchor="ctr"/>
           <a:lstStyle/>
           <a:p>
-            <a:pPr indent="0" marL="0">
+            <a:pPr marL="0" indent="0">
               <a:buNone/>
             </a:pPr>
             <a:r>
@@ -5790,6 +5877,13 @@
             <a:prstDash val="solid"/>
           </a:ln>
         </p:spPr>
+        <p:txBody>
+          <a:bodyPr/>
+          <a:lstStyle/>
+          <a:p>
+            <a:endParaRPr lang="zh-CN" altLang="en-US"/>
+          </a:p>
+        </p:txBody>
       </p:sp>
       <p:sp>
         <p:nvSpPr>
@@ -5812,7 +5906,7 @@
           <a:bodyPr wrap="square" rtlCol="0" anchor="ctr"/>
           <a:lstStyle/>
           <a:p>
-            <a:pPr indent="0" marL="0">
+            <a:pPr marL="0" indent="0">
               <a:buNone/>
             </a:pPr>
             <a:r>
@@ -5854,6 +5948,13 @@
             <a:prstDash val="solid"/>
           </a:ln>
         </p:spPr>
+        <p:txBody>
+          <a:bodyPr/>
+          <a:lstStyle/>
+          <a:p>
+            <a:endParaRPr lang="zh-CN" altLang="en-US"/>
+          </a:p>
+        </p:txBody>
       </p:sp>
       <p:sp>
         <p:nvSpPr>
@@ -5876,7 +5977,7 @@
           <a:bodyPr wrap="square" rtlCol="0" anchor="ctr"/>
           <a:lstStyle/>
           <a:p>
-            <a:pPr indent="0" marL="0">
+            <a:pPr marL="0" indent="0">
               <a:buNone/>
             </a:pPr>
             <a:r>
@@ -5918,6 +6019,13 @@
             <a:prstDash val="solid"/>
           </a:ln>
         </p:spPr>
+        <p:txBody>
+          <a:bodyPr/>
+          <a:lstStyle/>
+          <a:p>
+            <a:endParaRPr lang="zh-CN" altLang="en-US"/>
+          </a:p>
+        </p:txBody>
       </p:sp>
       <p:sp>
         <p:nvSpPr>
@@ -5940,7 +6048,7 @@
           <a:bodyPr wrap="square" rtlCol="0" anchor="ctr"/>
           <a:lstStyle/>
           <a:p>
-            <a:pPr indent="0" marL="0">
+            <a:pPr marL="0" indent="0">
               <a:buNone/>
             </a:pPr>
             <a:r>
@@ -5982,6 +6090,13 @@
             <a:prstDash val="solid"/>
           </a:ln>
         </p:spPr>
+        <p:txBody>
+          <a:bodyPr/>
+          <a:lstStyle/>
+          <a:p>
+            <a:endParaRPr lang="zh-CN" altLang="en-US"/>
+          </a:p>
+        </p:txBody>
       </p:sp>
       <p:sp>
         <p:nvSpPr>
@@ -6004,7 +6119,7 @@
           <a:bodyPr wrap="square" rtlCol="0" anchor="ctr"/>
           <a:lstStyle/>
           <a:p>
-            <a:pPr indent="0" marL="0">
+            <a:pPr marL="0" indent="0">
               <a:buNone/>
             </a:pPr>
             <a:r>
@@ -6046,6 +6161,13 @@
             <a:prstDash val="solid"/>
           </a:ln>
         </p:spPr>
+        <p:txBody>
+          <a:bodyPr/>
+          <a:lstStyle/>
+          <a:p>
+            <a:endParaRPr lang="zh-CN" altLang="en-US"/>
+          </a:p>
+        </p:txBody>
       </p:sp>
       <p:sp>
         <p:nvSpPr>
@@ -6068,7 +6190,7 @@
           <a:bodyPr wrap="square" rtlCol="0" anchor="ctr"/>
           <a:lstStyle/>
           <a:p>
-            <a:pPr indent="0" marL="0">
+            <a:pPr marL="0" indent="0">
               <a:buNone/>
             </a:pPr>
             <a:r>
@@ -6110,6 +6232,13 @@
             <a:prstDash val="solid"/>
           </a:ln>
         </p:spPr>
+        <p:txBody>
+          <a:bodyPr/>
+          <a:lstStyle/>
+          <a:p>
+            <a:endParaRPr lang="zh-CN" altLang="en-US"/>
+          </a:p>
+        </p:txBody>
       </p:sp>
       <p:sp>
         <p:nvSpPr>
@@ -6132,7 +6261,7 @@
           <a:bodyPr wrap="square" rtlCol="0" anchor="ctr"/>
           <a:lstStyle/>
           <a:p>
-            <a:pPr indent="0" marL="0">
+            <a:pPr marL="0" indent="0">
               <a:buNone/>
             </a:pPr>
             <a:r>
@@ -6174,6 +6303,13 @@
             <a:prstDash val="solid"/>
           </a:ln>
         </p:spPr>
+        <p:txBody>
+          <a:bodyPr/>
+          <a:lstStyle/>
+          <a:p>
+            <a:endParaRPr lang="zh-CN" altLang="en-US"/>
+          </a:p>
+        </p:txBody>
       </p:sp>
       <p:sp>
         <p:nvSpPr>
@@ -6196,7 +6332,7 @@
           <a:bodyPr wrap="square" rtlCol="0" anchor="ctr"/>
           <a:lstStyle/>
           <a:p>
-            <a:pPr indent="0" marL="0">
+            <a:pPr marL="0" indent="0">
               <a:buNone/>
             </a:pPr>
             <a:r>
@@ -6238,6 +6374,13 @@
             <a:prstDash val="solid"/>
           </a:ln>
         </p:spPr>
+        <p:txBody>
+          <a:bodyPr/>
+          <a:lstStyle/>
+          <a:p>
+            <a:endParaRPr lang="zh-CN" altLang="en-US"/>
+          </a:p>
+        </p:txBody>
       </p:sp>
       <p:sp>
         <p:nvSpPr>
@@ -6260,7 +6403,7 @@
           <a:bodyPr wrap="square" rtlCol="0" anchor="ctr"/>
           <a:lstStyle/>
           <a:p>
-            <a:pPr indent="0" marL="0">
+            <a:pPr marL="0" indent="0">
               <a:buNone/>
             </a:pPr>
             <a:r>
@@ -6302,6 +6445,13 @@
             <a:prstDash val="solid"/>
           </a:ln>
         </p:spPr>
+        <p:txBody>
+          <a:bodyPr/>
+          <a:lstStyle/>
+          <a:p>
+            <a:endParaRPr lang="zh-CN" altLang="en-US"/>
+          </a:p>
+        </p:txBody>
       </p:sp>
       <p:sp>
         <p:nvSpPr>
@@ -6324,7 +6474,7 @@
           <a:bodyPr wrap="square" rtlCol="0" anchor="ctr"/>
           <a:lstStyle/>
           <a:p>
-            <a:pPr indent="0" marL="0">
+            <a:pPr marL="0" indent="0">
               <a:buNone/>
             </a:pPr>
             <a:r>
@@ -6366,6 +6516,13 @@
             <a:prstDash val="solid"/>
           </a:ln>
         </p:spPr>
+        <p:txBody>
+          <a:bodyPr/>
+          <a:lstStyle/>
+          <a:p>
+            <a:endParaRPr lang="zh-CN" altLang="en-US"/>
+          </a:p>
+        </p:txBody>
       </p:sp>
       <p:sp>
         <p:nvSpPr>
@@ -6388,7 +6545,7 @@
           <a:bodyPr wrap="square" rtlCol="0" anchor="ctr"/>
           <a:lstStyle/>
           <a:p>
-            <a:pPr indent="0" marL="0">
+            <a:pPr marL="0" indent="0">
               <a:buNone/>
             </a:pPr>
             <a:r>
@@ -6422,6 +6579,7 @@
         <a:solidFill>
           <a:srgbClr val="F8FAFC"/>
         </a:solidFill>
+        <a:effectLst/>
       </p:bgPr>
     </p:bg>
     <p:spTree>
@@ -6462,6 +6620,13 @@
             <a:prstDash val="solid"/>
           </a:ln>
         </p:spPr>
+        <p:txBody>
+          <a:bodyPr/>
+          <a:lstStyle/>
+          <a:p>
+            <a:endParaRPr lang="zh-CN" altLang="en-US"/>
+          </a:p>
+        </p:txBody>
       </p:sp>
       <p:sp>
         <p:nvSpPr>
@@ -6484,7 +6649,7 @@
           <a:bodyPr wrap="square" lIns="0" tIns="0" rIns="0" bIns="0" rtlCol="0" anchor="ctr"/>
           <a:lstStyle/>
           <a:p>
-            <a:pPr indent="0" marL="0">
+            <a:pPr marL="0" indent="0">
               <a:buNone/>
             </a:pPr>
             <a:r>
@@ -6524,6 +6689,13 @@
             <a:prstDash val="solid"/>
           </a:ln>
         </p:spPr>
+        <p:txBody>
+          <a:bodyPr/>
+          <a:lstStyle/>
+          <a:p>
+            <a:endParaRPr lang="zh-CN" altLang="en-US"/>
+          </a:p>
+        </p:txBody>
       </p:sp>
       <p:sp>
         <p:nvSpPr>
@@ -6549,6 +6721,13 @@
             <a:prstDash val="solid"/>
           </a:ln>
         </p:spPr>
+        <p:txBody>
+          <a:bodyPr/>
+          <a:lstStyle/>
+          <a:p>
+            <a:endParaRPr lang="zh-CN" altLang="en-US"/>
+          </a:p>
+        </p:txBody>
       </p:sp>
       <p:sp>
         <p:nvSpPr>
@@ -6574,6 +6753,13 @@
             <a:prstDash val="solid"/>
           </a:ln>
         </p:spPr>
+        <p:txBody>
+          <a:bodyPr/>
+          <a:lstStyle/>
+          <a:p>
+            <a:endParaRPr lang="zh-CN" altLang="en-US"/>
+          </a:p>
+        </p:txBody>
       </p:sp>
       <p:sp>
         <p:nvSpPr>
@@ -6596,7 +6782,7 @@
           <a:bodyPr wrap="square" lIns="0" tIns="0" rIns="0" bIns="0" rtlCol="0" anchor="ctr"/>
           <a:lstStyle/>
           <a:p>
-            <a:pPr indent="0" marL="0">
+            <a:pPr marL="0" indent="0">
               <a:buNone/>
             </a:pPr>
             <a:r>
@@ -6635,7 +6821,7 @@
           <a:bodyPr wrap="square" rtlCol="0" anchor="ctr"/>
           <a:lstStyle/>
           <a:p>
-            <a:pPr indent="0" marL="0">
+            <a:pPr marL="0" indent="0">
               <a:buNone/>
             </a:pPr>
             <a:r>
@@ -6674,7 +6860,7 @@
           <a:bodyPr wrap="square" rtlCol="0" anchor="ctr"/>
           <a:lstStyle/>
           <a:p>
-            <a:pPr indent="0" marL="0">
+            <a:pPr marL="0" indent="0">
               <a:buNone/>
             </a:pPr>
             <a:r>
@@ -6713,7 +6899,7 @@
           <a:bodyPr wrap="square" rtlCol="0" anchor="ctr"/>
           <a:lstStyle/>
           <a:p>
-            <a:pPr indent="0" marL="0">
+            <a:pPr marL="0" indent="0">
               <a:buNone/>
             </a:pPr>
             <a:r>
@@ -6752,7 +6938,7 @@
           <a:bodyPr wrap="square" rtlCol="0" anchor="ctr"/>
           <a:lstStyle/>
           <a:p>
-            <a:pPr indent="0" marL="0">
+            <a:pPr marL="0" indent="0">
               <a:buNone/>
             </a:pPr>
             <a:r>
@@ -6791,7 +6977,7 @@
           <a:bodyPr wrap="square" rtlCol="0" anchor="ctr"/>
           <a:lstStyle/>
           <a:p>
-            <a:pPr indent="0" marL="0">
+            <a:pPr marL="0" indent="0">
               <a:buNone/>
             </a:pPr>
             <a:r>
@@ -6830,7 +7016,7 @@
           <a:bodyPr wrap="square" rtlCol="0" anchor="ctr"/>
           <a:lstStyle/>
           <a:p>
-            <a:pPr indent="0" marL="0">
+            <a:pPr marL="0" indent="0">
               <a:buNone/>
             </a:pPr>
             <a:r>
@@ -6869,7 +7055,7 @@
           <a:bodyPr wrap="square" rtlCol="0" anchor="ctr"/>
           <a:lstStyle/>
           <a:p>
-            <a:pPr indent="0" marL="0">
+            <a:pPr marL="0" indent="0">
               <a:buNone/>
             </a:pPr>
             <a:r>
@@ -6908,7 +7094,7 @@
           <a:bodyPr wrap="square" rtlCol="0" anchor="ctr"/>
           <a:lstStyle/>
           <a:p>
-            <a:pPr indent="0" marL="0">
+            <a:pPr marL="0" indent="0">
               <a:buNone/>
             </a:pPr>
             <a:r>
@@ -6950,6 +7136,13 @@
             <a:prstDash val="solid"/>
           </a:ln>
         </p:spPr>
+        <p:txBody>
+          <a:bodyPr/>
+          <a:lstStyle/>
+          <a:p>
+            <a:endParaRPr lang="zh-CN" altLang="en-US"/>
+          </a:p>
+        </p:txBody>
       </p:sp>
       <p:sp>
         <p:nvSpPr>
@@ -6975,6 +7168,13 @@
             <a:prstDash val="solid"/>
           </a:ln>
         </p:spPr>
+        <p:txBody>
+          <a:bodyPr/>
+          <a:lstStyle/>
+          <a:p>
+            <a:endParaRPr lang="zh-CN" altLang="en-US"/>
+          </a:p>
+        </p:txBody>
       </p:sp>
       <p:sp>
         <p:nvSpPr>
@@ -6997,7 +7197,7 @@
           <a:bodyPr wrap="square" lIns="0" tIns="0" rIns="0" bIns="0" rtlCol="0" anchor="ctr"/>
           <a:lstStyle/>
           <a:p>
-            <a:pPr indent="0" marL="0">
+            <a:pPr marL="0" indent="0">
               <a:buNone/>
             </a:pPr>
             <a:r>
@@ -7036,7 +7236,7 @@
           <a:bodyPr wrap="square" rtlCol="0" anchor="ctr"/>
           <a:lstStyle/>
           <a:p>
-            <a:pPr indent="0" marL="0">
+            <a:pPr marL="0" indent="0">
               <a:buNone/>
             </a:pPr>
             <a:r>
@@ -7075,7 +7275,7 @@
           <a:bodyPr wrap="square" rtlCol="0" anchor="ctr"/>
           <a:lstStyle/>
           <a:p>
-            <a:pPr indent="0" marL="0">
+            <a:pPr marL="0" indent="0">
               <a:buNone/>
             </a:pPr>
             <a:r>
@@ -7114,7 +7314,7 @@
           <a:bodyPr wrap="square" rtlCol="0" anchor="ctr"/>
           <a:lstStyle/>
           <a:p>
-            <a:pPr indent="0" marL="0">
+            <a:pPr marL="0" indent="0">
               <a:buNone/>
             </a:pPr>
             <a:r>
@@ -7153,7 +7353,7 @@
           <a:bodyPr wrap="square" rtlCol="0" anchor="ctr"/>
           <a:lstStyle/>
           <a:p>
-            <a:pPr indent="0" marL="0">
+            <a:pPr marL="0" indent="0">
               <a:buNone/>
             </a:pPr>
             <a:r>
@@ -7192,7 +7392,7 @@
           <a:bodyPr wrap="square" rtlCol="0" anchor="ctr"/>
           <a:lstStyle/>
           <a:p>
-            <a:pPr indent="0" marL="0">
+            <a:pPr marL="0" indent="0">
               <a:buNone/>
             </a:pPr>
             <a:r>
@@ -7231,7 +7431,7 @@
           <a:bodyPr wrap="square" rtlCol="0" anchor="ctr"/>
           <a:lstStyle/>
           <a:p>
-            <a:pPr indent="0" marL="0">
+            <a:pPr marL="0" indent="0">
               <a:buNone/>
             </a:pPr>
             <a:r>
@@ -7270,7 +7470,7 @@
           <a:bodyPr wrap="square" rtlCol="0" anchor="ctr"/>
           <a:lstStyle/>
           <a:p>
-            <a:pPr indent="0" marL="0">
+            <a:pPr marL="0" indent="0">
               <a:buNone/>
             </a:pPr>
             <a:r>
@@ -7309,7 +7509,7 @@
           <a:bodyPr wrap="square" rtlCol="0" anchor="ctr"/>
           <a:lstStyle/>
           <a:p>
-            <a:pPr indent="0" marL="0">
+            <a:pPr marL="0" indent="0">
               <a:buNone/>
             </a:pPr>
             <a:r>
@@ -7343,6 +7543,7 @@
         <a:solidFill>
           <a:srgbClr val="0F172A"/>
         </a:solidFill>
+        <a:effectLst/>
       </p:bgPr>
     </p:bg>
     <p:spTree>
@@ -7383,6 +7584,13 @@
             <a:prstDash val="solid"/>
           </a:ln>
         </p:spPr>
+        <p:txBody>
+          <a:bodyPr/>
+          <a:lstStyle/>
+          <a:p>
+            <a:endParaRPr lang="zh-CN" altLang="en-US"/>
+          </a:p>
+        </p:txBody>
       </p:sp>
       <p:sp>
         <p:nvSpPr>
@@ -7408,6 +7616,13 @@
             <a:prstDash val="solid"/>
           </a:ln>
         </p:spPr>
+        <p:txBody>
+          <a:bodyPr/>
+          <a:lstStyle/>
+          <a:p>
+            <a:endParaRPr lang="zh-CN" altLang="en-US"/>
+          </a:p>
+        </p:txBody>
       </p:sp>
       <p:sp>
         <p:nvSpPr>
@@ -7430,7 +7645,7 @@
           <a:bodyPr wrap="square" rtlCol="0" anchor="ctr"/>
           <a:lstStyle/>
           <a:p>
-            <a:pPr indent="0" marL="0">
+            <a:pPr marL="0" indent="0">
               <a:buNone/>
             </a:pPr>
             <a:r>
@@ -7470,6 +7685,13 @@
             <a:prstDash val="solid"/>
           </a:ln>
         </p:spPr>
+        <p:txBody>
+          <a:bodyPr/>
+          <a:lstStyle/>
+          <a:p>
+            <a:endParaRPr lang="zh-CN" altLang="en-US"/>
+          </a:p>
+        </p:txBody>
       </p:sp>
       <p:sp>
         <p:nvSpPr>
@@ -7495,6 +7717,13 @@
             <a:prstDash val="solid"/>
           </a:ln>
         </p:spPr>
+        <p:txBody>
+          <a:bodyPr/>
+          <a:lstStyle/>
+          <a:p>
+            <a:endParaRPr lang="zh-CN" altLang="en-US"/>
+          </a:p>
+        </p:txBody>
       </p:sp>
       <p:sp>
         <p:nvSpPr>
@@ -7517,7 +7746,7 @@
           <a:bodyPr wrap="square" lIns="0" tIns="0" rIns="0" bIns="0" rtlCol="0" anchor="ctr"/>
           <a:lstStyle/>
           <a:p>
-            <a:pPr indent="0" marL="0">
+            <a:pPr marL="0" indent="0">
               <a:buNone/>
             </a:pPr>
             <a:r>
@@ -7556,7 +7785,7 @@
           <a:bodyPr wrap="square" lIns="0" tIns="0" rIns="0" bIns="0" rtlCol="0" anchor="ctr"/>
           <a:lstStyle/>
           <a:p>
-            <a:pPr indent="0" marL="0">
+            <a:pPr marL="0" indent="0">
               <a:buNone/>
             </a:pPr>
             <a:r>
@@ -7598,6 +7827,13 @@
             <a:prstDash val="solid"/>
           </a:ln>
         </p:spPr>
+        <p:txBody>
+          <a:bodyPr/>
+          <a:lstStyle/>
+          <a:p>
+            <a:endParaRPr lang="zh-CN" altLang="en-US"/>
+          </a:p>
+        </p:txBody>
       </p:sp>
       <p:sp>
         <p:nvSpPr>
@@ -7620,7 +7856,7 @@
           <a:bodyPr wrap="square" lIns="0" tIns="0" rIns="0" bIns="0" rtlCol="0" anchor="ctr"/>
           <a:lstStyle/>
           <a:p>
-            <a:pPr indent="0" marL="0">
+            <a:pPr marL="0" indent="0">
               <a:buNone/>
             </a:pPr>
             <a:r>
@@ -7659,7 +7895,7 @@
           <a:bodyPr wrap="square" lIns="0" tIns="0" rIns="0" bIns="0" rtlCol="0" anchor="ctr"/>
           <a:lstStyle/>
           <a:p>
-            <a:pPr indent="0" marL="0">
+            <a:pPr marL="0" indent="0">
               <a:buNone/>
             </a:pPr>
             <a:r>
@@ -7701,6 +7937,13 @@
             <a:prstDash val="solid"/>
           </a:ln>
         </p:spPr>
+        <p:txBody>
+          <a:bodyPr/>
+          <a:lstStyle/>
+          <a:p>
+            <a:endParaRPr lang="zh-CN" altLang="en-US"/>
+          </a:p>
+        </p:txBody>
       </p:sp>
       <p:sp>
         <p:nvSpPr>
@@ -7723,7 +7966,7 @@
           <a:bodyPr wrap="square" lIns="0" tIns="0" rIns="0" bIns="0" rtlCol="0" anchor="ctr"/>
           <a:lstStyle/>
           <a:p>
-            <a:pPr indent="0" marL="0">
+            <a:pPr marL="0" indent="0">
               <a:buNone/>
             </a:pPr>
             <a:r>
@@ -7762,7 +8005,7 @@
           <a:bodyPr wrap="square" lIns="0" tIns="0" rIns="0" bIns="0" rtlCol="0" anchor="ctr"/>
           <a:lstStyle/>
           <a:p>
-            <a:pPr indent="0" marL="0">
+            <a:pPr marL="0" indent="0">
               <a:buNone/>
             </a:pPr>
             <a:r>
@@ -7804,6 +8047,13 @@
             <a:prstDash val="solid"/>
           </a:ln>
         </p:spPr>
+        <p:txBody>
+          <a:bodyPr/>
+          <a:lstStyle/>
+          <a:p>
+            <a:endParaRPr lang="zh-CN" altLang="en-US"/>
+          </a:p>
+        </p:txBody>
       </p:sp>
       <p:sp>
         <p:nvSpPr>
@@ -7826,7 +8076,7 @@
           <a:bodyPr wrap="square" lIns="0" tIns="0" rIns="0" bIns="0" rtlCol="0" anchor="ctr"/>
           <a:lstStyle/>
           <a:p>
-            <a:pPr indent="0" marL="0">
+            <a:pPr marL="0" indent="0">
               <a:buNone/>
             </a:pPr>
             <a:r>
@@ -7865,7 +8115,7 @@
           <a:bodyPr wrap="square" lIns="0" tIns="0" rIns="0" bIns="0" rtlCol="0" anchor="ctr"/>
           <a:lstStyle/>
           <a:p>
-            <a:pPr indent="0" marL="0">
+            <a:pPr marL="0" indent="0">
               <a:buNone/>
             </a:pPr>
             <a:r>
@@ -7907,6 +8157,13 @@
             <a:prstDash val="solid"/>
           </a:ln>
         </p:spPr>
+        <p:txBody>
+          <a:bodyPr/>
+          <a:lstStyle/>
+          <a:p>
+            <a:endParaRPr lang="zh-CN" altLang="en-US"/>
+          </a:p>
+        </p:txBody>
       </p:sp>
       <p:sp>
         <p:nvSpPr>
@@ -7929,7 +8186,7 @@
           <a:bodyPr wrap="square" lIns="0" tIns="0" rIns="0" bIns="0" rtlCol="0" anchor="ctr"/>
           <a:lstStyle/>
           <a:p>
-            <a:pPr indent="0" marL="0">
+            <a:pPr marL="0" indent="0">
               <a:buNone/>
             </a:pPr>
             <a:r>
@@ -7968,7 +8225,7 @@
           <a:bodyPr wrap="square" lIns="0" tIns="0" rIns="0" bIns="0" rtlCol="0" anchor="ctr"/>
           <a:lstStyle/>
           <a:p>
-            <a:pPr indent="0" marL="0">
+            <a:pPr marL="0" indent="0">
               <a:buNone/>
             </a:pPr>
             <a:r>
@@ -8010,6 +8267,13 @@
             <a:prstDash val="solid"/>
           </a:ln>
         </p:spPr>
+        <p:txBody>
+          <a:bodyPr/>
+          <a:lstStyle/>
+          <a:p>
+            <a:endParaRPr lang="zh-CN" altLang="en-US"/>
+          </a:p>
+        </p:txBody>
       </p:sp>
       <p:sp>
         <p:nvSpPr>
@@ -8032,7 +8296,7 @@
           <a:bodyPr wrap="square" lIns="0" tIns="0" rIns="0" bIns="0" rtlCol="0" anchor="ctr"/>
           <a:lstStyle/>
           <a:p>
-            <a:pPr algn="ctr" indent="0" marL="0">
+            <a:pPr marL="0" indent="0" algn="ctr">
               <a:buNone/>
             </a:pPr>
             <a:r>
@@ -8066,6 +8330,7 @@
         <a:solidFill>
           <a:srgbClr val="F8FAFC"/>
         </a:solidFill>
+        <a:effectLst/>
       </p:bgPr>
     </p:bg>
     <p:spTree>
@@ -8106,6 +8371,13 @@
             <a:prstDash val="solid"/>
           </a:ln>
         </p:spPr>
+        <p:txBody>
+          <a:bodyPr/>
+          <a:lstStyle/>
+          <a:p>
+            <a:endParaRPr lang="zh-CN" altLang="en-US"/>
+          </a:p>
+        </p:txBody>
       </p:sp>
       <p:sp>
         <p:nvSpPr>
@@ -8128,7 +8400,7 @@
           <a:bodyPr wrap="square" lIns="0" tIns="0" rIns="0" bIns="0" rtlCol="0" anchor="ctr"/>
           <a:lstStyle/>
           <a:p>
-            <a:pPr indent="0" marL="0">
+            <a:pPr marL="0" indent="0">
               <a:buNone/>
             </a:pPr>
             <a:r>
@@ -8168,6 +8440,13 @@
             <a:prstDash val="solid"/>
           </a:ln>
         </p:spPr>
+        <p:txBody>
+          <a:bodyPr/>
+          <a:lstStyle/>
+          <a:p>
+            <a:endParaRPr lang="zh-CN" altLang="en-US"/>
+          </a:p>
+        </p:txBody>
       </p:sp>
       <p:sp>
         <p:nvSpPr>
@@ -8193,6 +8472,13 @@
             <a:prstDash val="solid"/>
           </a:ln>
         </p:spPr>
+        <p:txBody>
+          <a:bodyPr/>
+          <a:lstStyle/>
+          <a:p>
+            <a:endParaRPr lang="zh-CN" altLang="en-US"/>
+          </a:p>
+        </p:txBody>
       </p:sp>
       <p:sp>
         <p:nvSpPr>
@@ -8215,7 +8501,7 @@
           <a:bodyPr wrap="square" rtlCol="0" anchor="ctr"/>
           <a:lstStyle/>
           <a:p>
-            <a:pPr indent="0" marL="0">
+            <a:pPr marL="0" indent="0">
               <a:buNone/>
             </a:pPr>
             <a:r>
@@ -8330,7 +8616,7 @@
           <a:bodyPr wrap="square" rtlCol="0" anchor="ctr"/>
           <a:lstStyle/>
           <a:p>
-            <a:pPr indent="0" marL="0">
+            <a:pPr marL="0" indent="0">
               <a:buNone/>
             </a:pPr>
             <a:r>
@@ -8466,6 +8752,13 @@
             <a:prstDash val="solid"/>
           </a:ln>
         </p:spPr>
+        <p:txBody>
+          <a:bodyPr/>
+          <a:lstStyle/>
+          <a:p>
+            <a:endParaRPr lang="zh-CN" altLang="en-US"/>
+          </a:p>
+        </p:txBody>
       </p:sp>
       <p:sp>
         <p:nvSpPr>
@@ -8488,7 +8781,7 @@
           <a:bodyPr wrap="square" rtlCol="0" anchor="ctr"/>
           <a:lstStyle/>
           <a:p>
-            <a:pPr indent="0" marL="0">
+            <a:pPr marL="0" indent="0">
               <a:buNone/>
             </a:pPr>
             <a:r>
@@ -8530,6 +8823,13 @@
             <a:prstDash val="solid"/>
           </a:ln>
         </p:spPr>
+        <p:txBody>
+          <a:bodyPr/>
+          <a:lstStyle/>
+          <a:p>
+            <a:endParaRPr lang="zh-CN" altLang="en-US"/>
+          </a:p>
+        </p:txBody>
       </p:sp>
       <p:sp>
         <p:nvSpPr>
@@ -8552,7 +8852,7 @@
           <a:bodyPr wrap="square" lIns="0" tIns="0" rIns="0" bIns="0" rtlCol="0" anchor="ctr"/>
           <a:lstStyle/>
           <a:p>
-            <a:pPr algn="ctr" indent="0" marL="0">
+            <a:pPr marL="0" indent="0" algn="ctr">
               <a:buNone/>
             </a:pPr>
             <a:r>
@@ -8591,7 +8891,7 @@
           <a:bodyPr wrap="square" lIns="0" tIns="0" rIns="0" bIns="0" rtlCol="0" anchor="ctr"/>
           <a:lstStyle/>
           <a:p>
-            <a:pPr indent="0" marL="0">
+            <a:pPr marL="0" indent="0">
               <a:buNone/>
             </a:pPr>
             <a:r>
@@ -8633,6 +8933,13 @@
             <a:prstDash val="solid"/>
           </a:ln>
         </p:spPr>
+        <p:txBody>
+          <a:bodyPr/>
+          <a:lstStyle/>
+          <a:p>
+            <a:endParaRPr lang="zh-CN" altLang="en-US"/>
+          </a:p>
+        </p:txBody>
       </p:sp>
       <p:sp>
         <p:nvSpPr>
@@ -8655,7 +8962,7 @@
           <a:bodyPr wrap="square" lIns="0" tIns="0" rIns="0" bIns="0" rtlCol="0" anchor="ctr"/>
           <a:lstStyle/>
           <a:p>
-            <a:pPr algn="ctr" indent="0" marL="0">
+            <a:pPr marL="0" indent="0" algn="ctr">
               <a:buNone/>
             </a:pPr>
             <a:r>
@@ -8694,7 +9001,7 @@
           <a:bodyPr wrap="square" lIns="0" tIns="0" rIns="0" bIns="0" rtlCol="0" anchor="ctr"/>
           <a:lstStyle/>
           <a:p>
-            <a:pPr indent="0" marL="0">
+            <a:pPr marL="0" indent="0">
               <a:buNone/>
             </a:pPr>
             <a:r>
@@ -8736,6 +9043,13 @@
             <a:prstDash val="solid"/>
           </a:ln>
         </p:spPr>
+        <p:txBody>
+          <a:bodyPr/>
+          <a:lstStyle/>
+          <a:p>
+            <a:endParaRPr lang="zh-CN" altLang="en-US"/>
+          </a:p>
+        </p:txBody>
       </p:sp>
       <p:sp>
         <p:nvSpPr>
@@ -8758,7 +9072,7 @@
           <a:bodyPr wrap="square" lIns="0" tIns="0" rIns="0" bIns="0" rtlCol="0" anchor="ctr"/>
           <a:lstStyle/>
           <a:p>
-            <a:pPr algn="ctr" indent="0" marL="0">
+            <a:pPr marL="0" indent="0" algn="ctr">
               <a:buNone/>
             </a:pPr>
             <a:r>
@@ -8797,7 +9111,7 @@
           <a:bodyPr wrap="square" lIns="0" tIns="0" rIns="0" bIns="0" rtlCol="0" anchor="ctr"/>
           <a:lstStyle/>
           <a:p>
-            <a:pPr indent="0" marL="0">
+            <a:pPr marL="0" indent="0">
               <a:buNone/>
             </a:pPr>
             <a:r>
@@ -8839,6 +9153,13 @@
             <a:prstDash val="solid"/>
           </a:ln>
         </p:spPr>
+        <p:txBody>
+          <a:bodyPr/>
+          <a:lstStyle/>
+          <a:p>
+            <a:endParaRPr lang="zh-CN" altLang="en-US"/>
+          </a:p>
+        </p:txBody>
       </p:sp>
       <p:sp>
         <p:nvSpPr>
@@ -8861,7 +9182,7 @@
           <a:bodyPr wrap="square" lIns="0" tIns="0" rIns="0" bIns="0" rtlCol="0" anchor="ctr"/>
           <a:lstStyle/>
           <a:p>
-            <a:pPr algn="ctr" indent="0" marL="0">
+            <a:pPr marL="0" indent="0" algn="ctr">
               <a:buNone/>
             </a:pPr>
             <a:r>
@@ -8900,7 +9221,7 @@
           <a:bodyPr wrap="square" lIns="0" tIns="0" rIns="0" bIns="0" rtlCol="0" anchor="ctr"/>
           <a:lstStyle/>
           <a:p>
-            <a:pPr indent="0" marL="0">
+            <a:pPr marL="0" indent="0">
               <a:buNone/>
             </a:pPr>
             <a:r>
@@ -8942,6 +9263,13 @@
             <a:prstDash val="solid"/>
           </a:ln>
         </p:spPr>
+        <p:txBody>
+          <a:bodyPr/>
+          <a:lstStyle/>
+          <a:p>
+            <a:endParaRPr lang="zh-CN" altLang="en-US"/>
+          </a:p>
+        </p:txBody>
       </p:sp>
       <p:sp>
         <p:nvSpPr>
@@ -8964,7 +9292,7 @@
           <a:bodyPr wrap="square" lIns="0" tIns="0" rIns="0" bIns="0" rtlCol="0" anchor="ctr"/>
           <a:lstStyle/>
           <a:p>
-            <a:pPr algn="ctr" indent="0" marL="0">
+            <a:pPr marL="0" indent="0" algn="ctr">
               <a:buNone/>
             </a:pPr>
             <a:r>
@@ -9003,7 +9331,7 @@
           <a:bodyPr wrap="square" lIns="0" tIns="0" rIns="0" bIns="0" rtlCol="0" anchor="ctr"/>
           <a:lstStyle/>
           <a:p>
-            <a:pPr indent="0" marL="0">
+            <a:pPr marL="0" indent="0">
               <a:buNone/>
             </a:pPr>
             <a:r>
@@ -9045,6 +9373,13 @@
             <a:prstDash val="solid"/>
           </a:ln>
         </p:spPr>
+        <p:txBody>
+          <a:bodyPr/>
+          <a:lstStyle/>
+          <a:p>
+            <a:endParaRPr lang="zh-CN" altLang="en-US"/>
+          </a:p>
+        </p:txBody>
       </p:sp>
       <p:sp>
         <p:nvSpPr>
@@ -9067,7 +9402,7 @@
           <a:bodyPr wrap="square" lIns="0" tIns="0" rIns="0" bIns="0" rtlCol="0" anchor="ctr"/>
           <a:lstStyle/>
           <a:p>
-            <a:pPr algn="ctr" indent="0" marL="0">
+            <a:pPr marL="0" indent="0" algn="ctr">
               <a:buNone/>
             </a:pPr>
             <a:r>
@@ -9106,7 +9441,7 @@
           <a:bodyPr wrap="square" lIns="0" tIns="0" rIns="0" bIns="0" rtlCol="0" anchor="ctr"/>
           <a:lstStyle/>
           <a:p>
-            <a:pPr indent="0" marL="0">
+            <a:pPr marL="0" indent="0">
               <a:buNone/>
             </a:pPr>
             <a:r>
@@ -9148,6 +9483,13 @@
             <a:prstDash val="solid"/>
           </a:ln>
         </p:spPr>
+        <p:txBody>
+          <a:bodyPr/>
+          <a:lstStyle/>
+          <a:p>
+            <a:endParaRPr lang="zh-CN" altLang="en-US"/>
+          </a:p>
+        </p:txBody>
       </p:sp>
       <p:sp>
         <p:nvSpPr>
@@ -9170,7 +9512,7 @@
           <a:bodyPr wrap="square" lIns="0" tIns="0" rIns="0" bIns="0" rtlCol="0" anchor="ctr"/>
           <a:lstStyle/>
           <a:p>
-            <a:pPr algn="ctr" indent="0" marL="0">
+            <a:pPr marL="0" indent="0" algn="ctr">
               <a:buNone/>
             </a:pPr>
             <a:r>
@@ -9204,6 +9546,7 @@
         <a:solidFill>
           <a:srgbClr val="F8FAFC"/>
         </a:solidFill>
+        <a:effectLst/>
       </p:bgPr>
     </p:bg>
     <p:spTree>
@@ -9244,6 +9587,13 @@
             <a:prstDash val="solid"/>
           </a:ln>
         </p:spPr>
+        <p:txBody>
+          <a:bodyPr/>
+          <a:lstStyle/>
+          <a:p>
+            <a:endParaRPr lang="zh-CN" altLang="en-US"/>
+          </a:p>
+        </p:txBody>
       </p:sp>
       <p:sp>
         <p:nvSpPr>
@@ -9266,7 +9616,7 @@
           <a:bodyPr wrap="square" lIns="0" tIns="0" rIns="0" bIns="0" rtlCol="0" anchor="ctr"/>
           <a:lstStyle/>
           <a:p>
-            <a:pPr indent="0" marL="0">
+            <a:pPr marL="0" indent="0">
               <a:buNone/>
             </a:pPr>
             <a:r>
@@ -9306,6 +9656,13 @@
             <a:prstDash val="solid"/>
           </a:ln>
         </p:spPr>
+        <p:txBody>
+          <a:bodyPr/>
+          <a:lstStyle/>
+          <a:p>
+            <a:endParaRPr lang="zh-CN" altLang="en-US"/>
+          </a:p>
+        </p:txBody>
       </p:sp>
       <p:sp>
         <p:nvSpPr>
@@ -9331,6 +9688,13 @@
             <a:prstDash val="solid"/>
           </a:ln>
         </p:spPr>
+        <p:txBody>
+          <a:bodyPr/>
+          <a:lstStyle/>
+          <a:p>
+            <a:endParaRPr lang="zh-CN" altLang="en-US"/>
+          </a:p>
+        </p:txBody>
       </p:sp>
       <p:sp>
         <p:nvSpPr>
@@ -9356,6 +9720,13 @@
             <a:prstDash val="solid"/>
           </a:ln>
         </p:spPr>
+        <p:txBody>
+          <a:bodyPr/>
+          <a:lstStyle/>
+          <a:p>
+            <a:endParaRPr lang="zh-CN" altLang="en-US"/>
+          </a:p>
+        </p:txBody>
       </p:sp>
       <p:sp>
         <p:nvSpPr>
@@ -9378,7 +9749,7 @@
           <a:bodyPr wrap="square" lIns="0" tIns="0" rIns="0" bIns="0" rtlCol="0" anchor="ctr"/>
           <a:lstStyle/>
           <a:p>
-            <a:pPr algn="ctr" indent="0" marL="0">
+            <a:pPr marL="0" indent="0" algn="ctr">
               <a:buNone/>
             </a:pPr>
             <a:r>
@@ -9420,6 +9791,13 @@
             <a:prstDash val="solid"/>
           </a:ln>
         </p:spPr>
+        <p:txBody>
+          <a:bodyPr/>
+          <a:lstStyle/>
+          <a:p>
+            <a:endParaRPr lang="zh-CN" altLang="en-US"/>
+          </a:p>
+        </p:txBody>
       </p:sp>
       <p:sp>
         <p:nvSpPr>
@@ -9442,7 +9820,7 @@
           <a:bodyPr wrap="square" rtlCol="0" anchor="t"/>
           <a:lstStyle/>
           <a:p>
-            <a:pPr indent="0" marL="0">
+            <a:pPr marL="0" indent="0">
               <a:buNone/>
             </a:pPr>
             <a:r>
@@ -9484,6 +9862,13 @@
             <a:prstDash val="solid"/>
           </a:ln>
         </p:spPr>
+        <p:txBody>
+          <a:bodyPr/>
+          <a:lstStyle/>
+          <a:p>
+            <a:endParaRPr lang="zh-CN" altLang="en-US"/>
+          </a:p>
+        </p:txBody>
       </p:sp>
       <p:sp>
         <p:nvSpPr>
@@ -9506,7 +9891,7 @@
           <a:bodyPr wrap="square" rtlCol="0" anchor="t"/>
           <a:lstStyle/>
           <a:p>
-            <a:pPr indent="0" marL="0">
+            <a:pPr marL="0" indent="0">
               <a:buNone/>
             </a:pPr>
             <a:r>
@@ -9548,6 +9933,13 @@
             <a:prstDash val="solid"/>
           </a:ln>
         </p:spPr>
+        <p:txBody>
+          <a:bodyPr/>
+          <a:lstStyle/>
+          <a:p>
+            <a:endParaRPr lang="zh-CN" altLang="en-US"/>
+          </a:p>
+        </p:txBody>
       </p:sp>
       <p:sp>
         <p:nvSpPr>
@@ -9570,7 +9962,7 @@
           <a:bodyPr wrap="square" rtlCol="0" anchor="t"/>
           <a:lstStyle/>
           <a:p>
-            <a:pPr indent="0" marL="0">
+            <a:pPr marL="0" indent="0">
               <a:buNone/>
             </a:pPr>
             <a:r>
@@ -9612,6 +10004,13 @@
             <a:prstDash val="solid"/>
           </a:ln>
         </p:spPr>
+        <p:txBody>
+          <a:bodyPr/>
+          <a:lstStyle/>
+          <a:p>
+            <a:endParaRPr lang="zh-CN" altLang="en-US"/>
+          </a:p>
+        </p:txBody>
       </p:sp>
       <p:sp>
         <p:nvSpPr>
@@ -9634,7 +10033,7 @@
           <a:bodyPr wrap="square" rtlCol="0" anchor="t"/>
           <a:lstStyle/>
           <a:p>
-            <a:pPr indent="0" marL="0">
+            <a:pPr marL="0" indent="0">
               <a:buNone/>
             </a:pPr>
             <a:r>
@@ -9676,6 +10075,13 @@
             <a:prstDash val="solid"/>
           </a:ln>
         </p:spPr>
+        <p:txBody>
+          <a:bodyPr/>
+          <a:lstStyle/>
+          <a:p>
+            <a:endParaRPr lang="zh-CN" altLang="en-US"/>
+          </a:p>
+        </p:txBody>
       </p:sp>
       <p:sp>
         <p:nvSpPr>
@@ -9701,6 +10107,13 @@
             <a:prstDash val="solid"/>
           </a:ln>
         </p:spPr>
+        <p:txBody>
+          <a:bodyPr/>
+          <a:lstStyle/>
+          <a:p>
+            <a:endParaRPr lang="zh-CN" altLang="en-US"/>
+          </a:p>
+        </p:txBody>
       </p:sp>
       <p:sp>
         <p:nvSpPr>
@@ -9723,7 +10136,7 @@
           <a:bodyPr wrap="square" lIns="0" tIns="0" rIns="0" bIns="0" rtlCol="0" anchor="ctr"/>
           <a:lstStyle/>
           <a:p>
-            <a:pPr algn="ctr" indent="0" marL="0">
+            <a:pPr marL="0" indent="0" algn="ctr">
               <a:buNone/>
             </a:pPr>
             <a:r>
@@ -9765,6 +10178,13 @@
             <a:prstDash val="solid"/>
           </a:ln>
         </p:spPr>
+        <p:txBody>
+          <a:bodyPr/>
+          <a:lstStyle/>
+          <a:p>
+            <a:endParaRPr lang="zh-CN" altLang="en-US"/>
+          </a:p>
+        </p:txBody>
       </p:sp>
       <p:sp>
         <p:nvSpPr>
@@ -9787,7 +10207,7 @@
           <a:bodyPr wrap="square" rtlCol="0" anchor="t"/>
           <a:lstStyle/>
           <a:p>
-            <a:pPr indent="0" marL="0">
+            <a:pPr marL="0" indent="0">
               <a:buNone/>
             </a:pPr>
             <a:r>
@@ -9829,6 +10249,13 @@
             <a:prstDash val="solid"/>
           </a:ln>
         </p:spPr>
+        <p:txBody>
+          <a:bodyPr/>
+          <a:lstStyle/>
+          <a:p>
+            <a:endParaRPr lang="zh-CN" altLang="en-US"/>
+          </a:p>
+        </p:txBody>
       </p:sp>
       <p:sp>
         <p:nvSpPr>
@@ -9851,7 +10278,7 @@
           <a:bodyPr wrap="square" rtlCol="0" anchor="t"/>
           <a:lstStyle/>
           <a:p>
-            <a:pPr indent="0" marL="0">
+            <a:pPr marL="0" indent="0">
               <a:buNone/>
             </a:pPr>
             <a:r>
@@ -9893,6 +10320,13 @@
             <a:prstDash val="solid"/>
           </a:ln>
         </p:spPr>
+        <p:txBody>
+          <a:bodyPr/>
+          <a:lstStyle/>
+          <a:p>
+            <a:endParaRPr lang="zh-CN" altLang="en-US"/>
+          </a:p>
+        </p:txBody>
       </p:sp>
       <p:sp>
         <p:nvSpPr>
@@ -9915,7 +10349,7 @@
           <a:bodyPr wrap="square" rtlCol="0" anchor="t"/>
           <a:lstStyle/>
           <a:p>
-            <a:pPr indent="0" marL="0">
+            <a:pPr marL="0" indent="0">
               <a:buNone/>
             </a:pPr>
             <a:r>
@@ -9957,6 +10391,13 @@
             <a:prstDash val="solid"/>
           </a:ln>
         </p:spPr>
+        <p:txBody>
+          <a:bodyPr/>
+          <a:lstStyle/>
+          <a:p>
+            <a:endParaRPr lang="zh-CN" altLang="en-US"/>
+          </a:p>
+        </p:txBody>
       </p:sp>
       <p:sp>
         <p:nvSpPr>
@@ -9979,7 +10420,7 @@
           <a:bodyPr wrap="square" rtlCol="0" anchor="t"/>
           <a:lstStyle/>
           <a:p>
-            <a:pPr indent="0" marL="0">
+            <a:pPr marL="0" indent="0">
               <a:buNone/>
             </a:pPr>
             <a:r>
@@ -10021,6 +10462,13 @@
             <a:prstDash val="solid"/>
           </a:ln>
         </p:spPr>
+        <p:txBody>
+          <a:bodyPr/>
+          <a:lstStyle/>
+          <a:p>
+            <a:endParaRPr lang="zh-CN" altLang="en-US"/>
+          </a:p>
+        </p:txBody>
       </p:sp>
       <p:sp>
         <p:nvSpPr>
@@ -10046,6 +10494,13 @@
             <a:prstDash val="solid"/>
           </a:ln>
         </p:spPr>
+        <p:txBody>
+          <a:bodyPr/>
+          <a:lstStyle/>
+          <a:p>
+            <a:endParaRPr lang="zh-CN" altLang="en-US"/>
+          </a:p>
+        </p:txBody>
       </p:sp>
       <p:sp>
         <p:nvSpPr>
@@ -10068,7 +10523,7 @@
           <a:bodyPr wrap="square" lIns="0" tIns="0" rIns="0" bIns="0" rtlCol="0" anchor="ctr"/>
           <a:lstStyle/>
           <a:p>
-            <a:pPr algn="ctr" indent="0" marL="0">
+            <a:pPr marL="0" indent="0" algn="ctr">
               <a:buNone/>
             </a:pPr>
             <a:r>
@@ -10110,6 +10565,13 @@
             <a:prstDash val="solid"/>
           </a:ln>
         </p:spPr>
+        <p:txBody>
+          <a:bodyPr/>
+          <a:lstStyle/>
+          <a:p>
+            <a:endParaRPr lang="zh-CN" altLang="en-US"/>
+          </a:p>
+        </p:txBody>
       </p:sp>
       <p:sp>
         <p:nvSpPr>
@@ -10132,7 +10594,7 @@
           <a:bodyPr wrap="square" rtlCol="0" anchor="t"/>
           <a:lstStyle/>
           <a:p>
-            <a:pPr indent="0" marL="0">
+            <a:pPr marL="0" indent="0">
               <a:buNone/>
             </a:pPr>
             <a:r>
@@ -10174,6 +10636,13 @@
             <a:prstDash val="solid"/>
           </a:ln>
         </p:spPr>
+        <p:txBody>
+          <a:bodyPr/>
+          <a:lstStyle/>
+          <a:p>
+            <a:endParaRPr lang="zh-CN" altLang="en-US"/>
+          </a:p>
+        </p:txBody>
       </p:sp>
       <p:sp>
         <p:nvSpPr>
@@ -10196,7 +10665,7 @@
           <a:bodyPr wrap="square" rtlCol="0" anchor="t"/>
           <a:lstStyle/>
           <a:p>
-            <a:pPr indent="0" marL="0">
+            <a:pPr marL="0" indent="0">
               <a:buNone/>
             </a:pPr>
             <a:r>
@@ -10238,6 +10707,13 @@
             <a:prstDash val="solid"/>
           </a:ln>
         </p:spPr>
+        <p:txBody>
+          <a:bodyPr/>
+          <a:lstStyle/>
+          <a:p>
+            <a:endParaRPr lang="zh-CN" altLang="en-US"/>
+          </a:p>
+        </p:txBody>
       </p:sp>
       <p:sp>
         <p:nvSpPr>
@@ -10260,7 +10736,7 @@
           <a:bodyPr wrap="square" rtlCol="0" anchor="t"/>
           <a:lstStyle/>
           <a:p>
-            <a:pPr indent="0" marL="0">
+            <a:pPr marL="0" indent="0">
               <a:buNone/>
             </a:pPr>
             <a:r>
@@ -10302,6 +10778,13 @@
             <a:prstDash val="solid"/>
           </a:ln>
         </p:spPr>
+        <p:txBody>
+          <a:bodyPr/>
+          <a:lstStyle/>
+          <a:p>
+            <a:endParaRPr lang="zh-CN" altLang="en-US"/>
+          </a:p>
+        </p:txBody>
       </p:sp>
       <p:sp>
         <p:nvSpPr>
@@ -10324,7 +10807,7 @@
           <a:bodyPr wrap="square" rtlCol="0" anchor="t"/>
           <a:lstStyle/>
           <a:p>
-            <a:pPr indent="0" marL="0">
+            <a:pPr marL="0" indent="0">
               <a:buNone/>
             </a:pPr>
             <a:r>
@@ -10358,6 +10841,7 @@
         <a:solidFill>
           <a:srgbClr val="F8FAFC"/>
         </a:solidFill>
+        <a:effectLst/>
       </p:bgPr>
     </p:bg>
     <p:spTree>
@@ -10398,6 +10882,13 @@
             <a:prstDash val="solid"/>
           </a:ln>
         </p:spPr>
+        <p:txBody>
+          <a:bodyPr/>
+          <a:lstStyle/>
+          <a:p>
+            <a:endParaRPr lang="zh-CN" altLang="en-US"/>
+          </a:p>
+        </p:txBody>
       </p:sp>
       <p:sp>
         <p:nvSpPr>
@@ -10420,7 +10911,7 @@
           <a:bodyPr wrap="square" lIns="0" tIns="0" rIns="0" bIns="0" rtlCol="0" anchor="ctr"/>
           <a:lstStyle/>
           <a:p>
-            <a:pPr indent="0" marL="0">
+            <a:pPr marL="0" indent="0">
               <a:buNone/>
             </a:pPr>
             <a:r>
@@ -10460,6 +10951,13 @@
             <a:prstDash val="solid"/>
           </a:ln>
         </p:spPr>
+        <p:txBody>
+          <a:bodyPr/>
+          <a:lstStyle/>
+          <a:p>
+            <a:endParaRPr lang="zh-CN" altLang="en-US"/>
+          </a:p>
+        </p:txBody>
       </p:sp>
       <p:sp>
         <p:nvSpPr>
@@ -10485,6 +10983,13 @@
             <a:prstDash val="solid"/>
           </a:ln>
         </p:spPr>
+        <p:txBody>
+          <a:bodyPr/>
+          <a:lstStyle/>
+          <a:p>
+            <a:endParaRPr lang="zh-CN" altLang="en-US"/>
+          </a:p>
+        </p:txBody>
       </p:sp>
       <p:sp>
         <p:nvSpPr>
@@ -10510,6 +11015,13 @@
             <a:prstDash val="solid"/>
           </a:ln>
         </p:spPr>
+        <p:txBody>
+          <a:bodyPr/>
+          <a:lstStyle/>
+          <a:p>
+            <a:endParaRPr lang="zh-CN" altLang="en-US"/>
+          </a:p>
+        </p:txBody>
       </p:sp>
       <p:sp>
         <p:nvSpPr>
@@ -10532,7 +11044,7 @@
           <a:bodyPr wrap="square" lIns="0" tIns="0" rIns="0" bIns="0" rtlCol="0" anchor="ctr"/>
           <a:lstStyle/>
           <a:p>
-            <a:pPr indent="0" marL="0">
+            <a:pPr marL="0" indent="0">
               <a:buNone/>
             </a:pPr>
             <a:r>
@@ -10571,7 +11083,7 @@
           <a:bodyPr wrap="square" lIns="0" tIns="0" rIns="0" bIns="0" rtlCol="0" anchor="ctr"/>
           <a:lstStyle/>
           <a:p>
-            <a:pPr algn="r" indent="0" marL="0">
+            <a:pPr marL="0" indent="0" algn="r">
               <a:buNone/>
             </a:pPr>
             <a:r>
@@ -10610,7 +11122,7 @@
           <a:bodyPr wrap="square" rtlCol="0" anchor="ctr"/>
           <a:lstStyle/>
           <a:p>
-            <a:pPr indent="0" marL="0">
+            <a:pPr marL="0" indent="0">
               <a:buNone/>
             </a:pPr>
             <a:r>
@@ -10649,7 +11161,7 @@
           <a:bodyPr wrap="square" rtlCol="0" anchor="ctr"/>
           <a:lstStyle/>
           <a:p>
-            <a:pPr indent="0" marL="0">
+            <a:pPr marL="0" indent="0">
               <a:buNone/>
             </a:pPr>
             <a:r>
@@ -10688,7 +11200,7 @@
           <a:bodyPr wrap="square" rtlCol="0" anchor="ctr"/>
           <a:lstStyle/>
           <a:p>
-            <a:pPr indent="0" marL="0">
+            <a:pPr marL="0" indent="0">
               <a:buNone/>
             </a:pPr>
             <a:r>
@@ -10727,7 +11239,7 @@
           <a:bodyPr wrap="square" rtlCol="0" anchor="ctr"/>
           <a:lstStyle/>
           <a:p>
-            <a:pPr indent="0" marL="0">
+            <a:pPr marL="0" indent="0">
               <a:buNone/>
             </a:pPr>
             <a:r>
@@ -10766,7 +11278,7 @@
           <a:bodyPr wrap="square" rtlCol="0" anchor="ctr"/>
           <a:lstStyle/>
           <a:p>
-            <a:pPr indent="0" marL="0">
+            <a:pPr marL="0" indent="0">
               <a:buNone/>
             </a:pPr>
             <a:r>
@@ -10805,7 +11317,7 @@
           <a:bodyPr wrap="square" rtlCol="0" anchor="ctr"/>
           <a:lstStyle/>
           <a:p>
-            <a:pPr indent="0" marL="0">
+            <a:pPr marL="0" indent="0">
               <a:buNone/>
             </a:pPr>
             <a:r>
@@ -10844,7 +11356,7 @@
           <a:bodyPr wrap="square" rtlCol="0" anchor="ctr"/>
           <a:lstStyle/>
           <a:p>
-            <a:pPr indent="0" marL="0">
+            <a:pPr marL="0" indent="0">
               <a:buNone/>
             </a:pPr>
             <a:r>
@@ -10883,7 +11395,7 @@
           <a:bodyPr wrap="square" rtlCol="0" anchor="ctr"/>
           <a:lstStyle/>
           <a:p>
-            <a:pPr indent="0" marL="0">
+            <a:pPr marL="0" indent="0">
               <a:buNone/>
             </a:pPr>
             <a:r>
@@ -10922,7 +11434,7 @@
           <a:bodyPr wrap="square" rtlCol="0" anchor="ctr"/>
           <a:lstStyle/>
           <a:p>
-            <a:pPr indent="0" marL="0">
+            <a:pPr marL="0" indent="0">
               <a:buNone/>
             </a:pPr>
             <a:r>
@@ -10961,7 +11473,7 @@
           <a:bodyPr wrap="square" rtlCol="0" anchor="ctr"/>
           <a:lstStyle/>
           <a:p>
-            <a:pPr indent="0" marL="0">
+            <a:pPr marL="0" indent="0">
               <a:buNone/>
             </a:pPr>
             <a:r>
@@ -11000,7 +11512,7 @@
           <a:bodyPr wrap="square" rtlCol="0" anchor="ctr"/>
           <a:lstStyle/>
           <a:p>
-            <a:pPr indent="0" marL="0">
+            <a:pPr marL="0" indent="0">
               <a:buNone/>
             </a:pPr>
             <a:r>
@@ -11042,6 +11554,13 @@
             <a:prstDash val="solid"/>
           </a:ln>
         </p:spPr>
+        <p:txBody>
+          <a:bodyPr/>
+          <a:lstStyle/>
+          <a:p>
+            <a:endParaRPr lang="zh-CN" altLang="en-US"/>
+          </a:p>
+        </p:txBody>
       </p:sp>
       <p:sp>
         <p:nvSpPr>
@@ -11067,6 +11586,13 @@
             <a:prstDash val="solid"/>
           </a:ln>
         </p:spPr>
+        <p:txBody>
+          <a:bodyPr/>
+          <a:lstStyle/>
+          <a:p>
+            <a:endParaRPr lang="zh-CN" altLang="en-US"/>
+          </a:p>
+        </p:txBody>
       </p:sp>
       <p:sp>
         <p:nvSpPr>
@@ -11089,7 +11615,7 @@
           <a:bodyPr wrap="square" lIns="0" tIns="0" rIns="0" bIns="0" rtlCol="0" anchor="ctr"/>
           <a:lstStyle/>
           <a:p>
-            <a:pPr indent="0" marL="0">
+            <a:pPr marL="0" indent="0">
               <a:buNone/>
             </a:pPr>
             <a:r>
@@ -11128,7 +11654,7 @@
           <a:bodyPr wrap="square" lIns="0" tIns="0" rIns="0" bIns="0" rtlCol="0" anchor="ctr"/>
           <a:lstStyle/>
           <a:p>
-            <a:pPr algn="r" indent="0" marL="0">
+            <a:pPr marL="0" indent="0" algn="r">
               <a:buNone/>
             </a:pPr>
             <a:r>
@@ -11167,7 +11693,7 @@
           <a:bodyPr wrap="square" rtlCol="0" anchor="ctr"/>
           <a:lstStyle/>
           <a:p>
-            <a:pPr indent="0" marL="0">
+            <a:pPr marL="0" indent="0">
               <a:buNone/>
             </a:pPr>
             <a:r>
@@ -11206,7 +11732,7 @@
           <a:bodyPr wrap="square" rtlCol="0" anchor="ctr"/>
           <a:lstStyle/>
           <a:p>
-            <a:pPr indent="0" marL="0">
+            <a:pPr marL="0" indent="0">
               <a:buNone/>
             </a:pPr>
             <a:r>
@@ -11245,7 +11771,7 @@
           <a:bodyPr wrap="square" rtlCol="0" anchor="ctr"/>
           <a:lstStyle/>
           <a:p>
-            <a:pPr indent="0" marL="0">
+            <a:pPr marL="0" indent="0">
               <a:buNone/>
             </a:pPr>
             <a:r>
@@ -11284,7 +11810,7 @@
           <a:bodyPr wrap="square" rtlCol="0" anchor="ctr"/>
           <a:lstStyle/>
           <a:p>
-            <a:pPr indent="0" marL="0">
+            <a:pPr marL="0" indent="0">
               <a:buNone/>
             </a:pPr>
             <a:r>
@@ -11323,7 +11849,7 @@
           <a:bodyPr wrap="square" rtlCol="0" anchor="ctr"/>
           <a:lstStyle/>
           <a:p>
-            <a:pPr indent="0" marL="0">
+            <a:pPr marL="0" indent="0">
               <a:buNone/>
             </a:pPr>
             <a:r>
@@ -11362,7 +11888,7 @@
           <a:bodyPr wrap="square" rtlCol="0" anchor="ctr"/>
           <a:lstStyle/>
           <a:p>
-            <a:pPr indent="0" marL="0">
+            <a:pPr marL="0" indent="0">
               <a:buNone/>
             </a:pPr>
             <a:r>
@@ -11401,7 +11927,7 @@
           <a:bodyPr wrap="square" rtlCol="0" anchor="ctr"/>
           <a:lstStyle/>
           <a:p>
-            <a:pPr indent="0" marL="0">
+            <a:pPr marL="0" indent="0">
               <a:buNone/>
             </a:pPr>
             <a:r>
@@ -11440,7 +11966,7 @@
           <a:bodyPr wrap="square" rtlCol="0" anchor="ctr"/>
           <a:lstStyle/>
           <a:p>
-            <a:pPr indent="0" marL="0">
+            <a:pPr marL="0" indent="0">
               <a:buNone/>
             </a:pPr>
             <a:r>
@@ -11482,6 +12008,13 @@
             <a:prstDash val="solid"/>
           </a:ln>
         </p:spPr>
+        <p:txBody>
+          <a:bodyPr/>
+          <a:lstStyle/>
+          <a:p>
+            <a:endParaRPr lang="zh-CN" altLang="en-US"/>
+          </a:p>
+        </p:txBody>
       </p:sp>
       <p:sp>
         <p:nvSpPr>
@@ -11507,6 +12040,13 @@
             <a:prstDash val="solid"/>
           </a:ln>
         </p:spPr>
+        <p:txBody>
+          <a:bodyPr/>
+          <a:lstStyle/>
+          <a:p>
+            <a:endParaRPr lang="zh-CN" altLang="en-US"/>
+          </a:p>
+        </p:txBody>
       </p:sp>
       <p:sp>
         <p:nvSpPr>
@@ -11529,7 +12069,7 @@
           <a:bodyPr wrap="square" lIns="0" tIns="0" rIns="0" bIns="0" rtlCol="0" anchor="ctr"/>
           <a:lstStyle/>
           <a:p>
-            <a:pPr indent="0" marL="0">
+            <a:pPr marL="0" indent="0">
               <a:buNone/>
             </a:pPr>
             <a:r>
@@ -11568,7 +12108,7 @@
           <a:bodyPr wrap="square" lIns="0" tIns="0" rIns="0" bIns="0" rtlCol="0" anchor="ctr"/>
           <a:lstStyle/>
           <a:p>
-            <a:pPr algn="r" indent="0" marL="0">
+            <a:pPr marL="0" indent="0" algn="r">
               <a:buNone/>
             </a:pPr>
             <a:r>
@@ -11607,7 +12147,7 @@
           <a:bodyPr wrap="square" rtlCol="0" anchor="ctr"/>
           <a:lstStyle/>
           <a:p>
-            <a:pPr indent="0" marL="0">
+            <a:pPr marL="0" indent="0">
               <a:buNone/>
             </a:pPr>
             <a:r>
@@ -11646,7 +12186,7 @@
           <a:bodyPr wrap="square" rtlCol="0" anchor="ctr"/>
           <a:lstStyle/>
           <a:p>
-            <a:pPr indent="0" marL="0">
+            <a:pPr marL="0" indent="0">
               <a:buNone/>
             </a:pPr>
             <a:r>
@@ -11685,7 +12225,7 @@
           <a:bodyPr wrap="square" rtlCol="0" anchor="ctr"/>
           <a:lstStyle/>
           <a:p>
-            <a:pPr indent="0" marL="0">
+            <a:pPr marL="0" indent="0">
               <a:buNone/>
             </a:pPr>
             <a:r>
@@ -11724,7 +12264,7 @@
           <a:bodyPr wrap="square" rtlCol="0" anchor="ctr"/>
           <a:lstStyle/>
           <a:p>
-            <a:pPr indent="0" marL="0">
+            <a:pPr marL="0" indent="0">
               <a:buNone/>
             </a:pPr>
             <a:r>
@@ -11763,7 +12303,7 @@
           <a:bodyPr wrap="square" rtlCol="0" anchor="ctr"/>
           <a:lstStyle/>
           <a:p>
-            <a:pPr indent="0" marL="0">
+            <a:pPr marL="0" indent="0">
               <a:buNone/>
             </a:pPr>
             <a:r>
@@ -11802,7 +12342,7 @@
           <a:bodyPr wrap="square" rtlCol="0" anchor="ctr"/>
           <a:lstStyle/>
           <a:p>
-            <a:pPr indent="0" marL="0">
+            <a:pPr marL="0" indent="0">
               <a:buNone/>
             </a:pPr>
             <a:r>
@@ -11841,7 +12381,7 @@
           <a:bodyPr wrap="square" rtlCol="0" anchor="ctr"/>
           <a:lstStyle/>
           <a:p>
-            <a:pPr indent="0" marL="0">
+            <a:pPr marL="0" indent="0">
               <a:buNone/>
             </a:pPr>
             <a:r>
@@ -11880,7 +12420,7 @@
           <a:bodyPr wrap="square" rtlCol="0" anchor="ctr"/>
           <a:lstStyle/>
           <a:p>
-            <a:pPr indent="0" marL="0">
+            <a:pPr marL="0" indent="0">
               <a:buNone/>
             </a:pPr>
             <a:r>
@@ -11919,7 +12459,7 @@
           <a:bodyPr wrap="square" rtlCol="0" anchor="ctr"/>
           <a:lstStyle/>
           <a:p>
-            <a:pPr indent="0" marL="0">
+            <a:pPr marL="0" indent="0">
               <a:buNone/>
             </a:pPr>
             <a:r>
@@ -11953,6 +12493,7 @@
         <a:solidFill>
           <a:srgbClr val="F8FAFC"/>
         </a:solidFill>
+        <a:effectLst/>
       </p:bgPr>
     </p:bg>
     <p:spTree>
@@ -11993,6 +12534,13 @@
             <a:prstDash val="solid"/>
           </a:ln>
         </p:spPr>
+        <p:txBody>
+          <a:bodyPr/>
+          <a:lstStyle/>
+          <a:p>
+            <a:endParaRPr lang="zh-CN" altLang="en-US"/>
+          </a:p>
+        </p:txBody>
       </p:sp>
       <p:sp>
         <p:nvSpPr>
@@ -12015,7 +12563,7 @@
           <a:bodyPr wrap="square" lIns="0" tIns="0" rIns="0" bIns="0" rtlCol="0" anchor="ctr"/>
           <a:lstStyle/>
           <a:p>
-            <a:pPr indent="0" marL="0">
+            <a:pPr marL="0" indent="0">
               <a:buNone/>
             </a:pPr>
             <a:r>
@@ -12055,6 +12603,13 @@
             <a:prstDash val="solid"/>
           </a:ln>
         </p:spPr>
+        <p:txBody>
+          <a:bodyPr/>
+          <a:lstStyle/>
+          <a:p>
+            <a:endParaRPr lang="zh-CN" altLang="en-US"/>
+          </a:p>
+        </p:txBody>
       </p:sp>
       <p:sp>
         <p:nvSpPr>
@@ -12080,6 +12635,13 @@
             <a:prstDash val="solid"/>
           </a:ln>
         </p:spPr>
+        <p:txBody>
+          <a:bodyPr/>
+          <a:lstStyle/>
+          <a:p>
+            <a:endParaRPr lang="zh-CN" altLang="en-US"/>
+          </a:p>
+        </p:txBody>
       </p:sp>
       <p:sp>
         <p:nvSpPr>
@@ -12102,7 +12664,7 @@
           <a:bodyPr wrap="square" rtlCol="0" anchor="ctr"/>
           <a:lstStyle/>
           <a:p>
-            <a:pPr indent="0" marL="0">
+            <a:pPr marL="0" indent="0">
               <a:buNone/>
             </a:pPr>
             <a:r>
@@ -12141,7 +12703,7 @@
           <a:bodyPr wrap="square" rtlCol="0" anchor="ctr"/>
           <a:lstStyle/>
           <a:p>
-            <a:pPr indent="0" marL="0">
+            <a:pPr marL="0" indent="0">
               <a:buNone/>
             </a:pPr>
             <a:r>
@@ -12183,6 +12745,13 @@
             <a:prstDash val="solid"/>
           </a:ln>
         </p:spPr>
+        <p:txBody>
+          <a:bodyPr/>
+          <a:lstStyle/>
+          <a:p>
+            <a:endParaRPr lang="zh-CN" altLang="en-US"/>
+          </a:p>
+        </p:txBody>
       </p:sp>
       <p:sp>
         <p:nvSpPr>
@@ -12205,7 +12774,7 @@
           <a:bodyPr wrap="square" lIns="0" tIns="0" rIns="0" bIns="0" rtlCol="0" anchor="t"/>
           <a:lstStyle/>
           <a:p>
-            <a:pPr indent="0" marL="0">
+            <a:pPr marL="0" indent="0">
               <a:buNone/>
             </a:pPr>
             <a:r>
@@ -12222,7 +12791,7 @@
             <a:endParaRPr lang="en-US" sz="1000" dirty="0"/>
           </a:p>
           <a:p>
-            <a:pPr indent="0" marL="0">
+            <a:pPr marL="0" indent="0">
               <a:buNone/>
             </a:pPr>
             <a:r>
@@ -12239,7 +12808,7 @@
             <a:endParaRPr lang="en-US" sz="1000" dirty="0"/>
           </a:p>
           <a:p>
-            <a:pPr indent="0" marL="0">
+            <a:pPr marL="0" indent="0">
               <a:buNone/>
             </a:pPr>
             <a:r>
@@ -12256,7 +12825,7 @@
             <a:endParaRPr lang="en-US" sz="1000" dirty="0"/>
           </a:p>
           <a:p>
-            <a:pPr indent="0" marL="0">
+            <a:pPr marL="0" indent="0">
               <a:buNone/>
             </a:pPr>
             <a:r>
@@ -12295,7 +12864,7 @@
           <a:bodyPr wrap="square" rtlCol="0" anchor="ctr"/>
           <a:lstStyle/>
           <a:p>
-            <a:pPr indent="0" marL="0">
+            <a:pPr marL="0" indent="0">
               <a:buNone/>
             </a:pPr>
             <a:r>
@@ -12413,6 +12982,13 @@
             <a:prstDash val="solid"/>
           </a:ln>
         </p:spPr>
+        <p:txBody>
+          <a:bodyPr/>
+          <a:lstStyle/>
+          <a:p>
+            <a:endParaRPr lang="zh-CN" altLang="en-US"/>
+          </a:p>
+        </p:txBody>
       </p:sp>
       <p:sp>
         <p:nvSpPr>
@@ -12435,7 +13011,7 @@
           <a:bodyPr wrap="square" rtlCol="0" anchor="ctr"/>
           <a:lstStyle/>
           <a:p>
-            <a:pPr indent="0" marL="0">
+            <a:pPr marL="0" indent="0">
               <a:buNone/>
             </a:pPr>
             <a:r>
@@ -12477,6 +13053,13 @@
             <a:prstDash val="solid"/>
           </a:ln>
         </p:spPr>
+        <p:txBody>
+          <a:bodyPr/>
+          <a:lstStyle/>
+          <a:p>
+            <a:endParaRPr lang="zh-CN" altLang="en-US"/>
+          </a:p>
+        </p:txBody>
       </p:sp>
       <p:sp>
         <p:nvSpPr>
@@ -12499,7 +13082,7 @@
           <a:bodyPr wrap="square" lIns="0" tIns="0" rIns="0" bIns="0" rtlCol="0" anchor="t"/>
           <a:lstStyle/>
           <a:p>
-            <a:pPr indent="0" marL="0">
+            <a:pPr marL="0" indent="0">
               <a:buNone/>
             </a:pPr>
             <a:r>
@@ -12516,7 +13099,7 @@
             <a:endParaRPr lang="en-US" sz="1000" dirty="0"/>
           </a:p>
           <a:p>
-            <a:pPr indent="0" marL="0">
+            <a:pPr marL="0" indent="0">
               <a:buNone/>
             </a:pPr>
             <a:r>
@@ -12533,7 +13116,7 @@
             <a:endParaRPr lang="en-US" sz="1000" dirty="0"/>
           </a:p>
           <a:p>
-            <a:pPr indent="0" marL="0">
+            <a:pPr marL="0" indent="0">
               <a:buNone/>
             </a:pPr>
             <a:r>
@@ -12550,13 +13133,13 @@
             <a:endParaRPr lang="en-US" sz="1000" dirty="0"/>
           </a:p>
           <a:p>
-            <a:pPr indent="0" marL="0">
+            <a:pPr marL="0" indent="0">
               <a:buNone/>
             </a:pPr>
             <a:endParaRPr lang="en-US" sz="1000" dirty="0"/>
           </a:p>
           <a:p>
-            <a:pPr indent="0" marL="0">
+            <a:pPr marL="0" indent="0">
               <a:buNone/>
             </a:pPr>
             <a:r>
@@ -12573,7 +13156,7 @@
             <a:endParaRPr lang="en-US" sz="1000" dirty="0"/>
           </a:p>
           <a:p>
-            <a:pPr indent="0" marL="0">
+            <a:pPr marL="0" indent="0">
               <a:buNone/>
             </a:pPr>
             <a:r>
@@ -12590,7 +13173,7 @@
             <a:endParaRPr lang="en-US" sz="1000" dirty="0"/>
           </a:p>
           <a:p>
-            <a:pPr indent="0" marL="0">
+            <a:pPr marL="0" indent="0">
               <a:buNone/>
             </a:pPr>
             <a:r>
@@ -12607,7 +13190,7 @@
             <a:endParaRPr lang="en-US" sz="1000" dirty="0"/>
           </a:p>
           <a:p>
-            <a:pPr indent="0" marL="0">
+            <a:pPr marL="0" indent="0">
               <a:buNone/>
             </a:pPr>
             <a:r>
@@ -12624,13 +13207,13 @@
             <a:endParaRPr lang="en-US" sz="1000" dirty="0"/>
           </a:p>
           <a:p>
-            <a:pPr indent="0" marL="0">
+            <a:pPr marL="0" indent="0">
               <a:buNone/>
             </a:pPr>
             <a:endParaRPr lang="en-US" sz="1000" dirty="0"/>
           </a:p>
           <a:p>
-            <a:pPr indent="0" marL="0">
+            <a:pPr marL="0" indent="0">
               <a:buNone/>
             </a:pPr>
             <a:r>
@@ -12672,6 +13255,13 @@
             <a:prstDash val="solid"/>
           </a:ln>
         </p:spPr>
+        <p:txBody>
+          <a:bodyPr/>
+          <a:lstStyle/>
+          <a:p>
+            <a:endParaRPr lang="zh-CN" altLang="en-US"/>
+          </a:p>
+        </p:txBody>
       </p:sp>
       <p:sp>
         <p:nvSpPr>
@@ -12694,7 +13284,7 @@
           <a:bodyPr wrap="square" rtlCol="0" anchor="ctr"/>
           <a:lstStyle/>
           <a:p>
-            <a:pPr indent="0" marL="0">
+            <a:pPr marL="0" indent="0">
               <a:buNone/>
             </a:pPr>
             <a:r>
@@ -12733,7 +13323,7 @@
           <a:bodyPr wrap="square" rtlCol="0" anchor="ctr"/>
           <a:lstStyle/>
           <a:p>
-            <a:pPr indent="0" marL="0">
+            <a:pPr marL="0" indent="0">
               <a:buNone/>
             </a:pPr>
             <a:r>
@@ -12767,6 +13357,7 @@
         <a:solidFill>
           <a:srgbClr val="F8FAFC"/>
         </a:solidFill>
+        <a:effectLst/>
       </p:bgPr>
     </p:bg>
     <p:spTree>
@@ -12807,6 +13398,13 @@
             <a:prstDash val="solid"/>
           </a:ln>
         </p:spPr>
+        <p:txBody>
+          <a:bodyPr/>
+          <a:lstStyle/>
+          <a:p>
+            <a:endParaRPr lang="zh-CN" altLang="en-US"/>
+          </a:p>
+        </p:txBody>
       </p:sp>
       <p:sp>
         <p:nvSpPr>
@@ -12829,7 +13427,7 @@
           <a:bodyPr wrap="square" lIns="0" tIns="0" rIns="0" bIns="0" rtlCol="0" anchor="ctr"/>
           <a:lstStyle/>
           <a:p>
-            <a:pPr indent="0" marL="0">
+            <a:pPr marL="0" indent="0">
               <a:buNone/>
             </a:pPr>
             <a:r>
@@ -12869,6 +13467,13 @@
             <a:prstDash val="solid"/>
           </a:ln>
         </p:spPr>
+        <p:txBody>
+          <a:bodyPr/>
+          <a:lstStyle/>
+          <a:p>
+            <a:endParaRPr lang="zh-CN" altLang="en-US"/>
+          </a:p>
+        </p:txBody>
       </p:sp>
       <p:sp>
         <p:nvSpPr>
@@ -12894,6 +13499,13 @@
             <a:prstDash val="solid"/>
           </a:ln>
         </p:spPr>
+        <p:txBody>
+          <a:bodyPr/>
+          <a:lstStyle/>
+          <a:p>
+            <a:endParaRPr lang="zh-CN" altLang="en-US"/>
+          </a:p>
+        </p:txBody>
       </p:sp>
       <p:sp>
         <p:nvSpPr>
@@ -12916,7 +13528,7 @@
           <a:bodyPr wrap="square" rtlCol="0" anchor="ctr"/>
           <a:lstStyle/>
           <a:p>
-            <a:pPr indent="0" marL="0">
+            <a:pPr marL="0" indent="0">
               <a:buNone/>
             </a:pPr>
             <a:r>
@@ -12955,7 +13567,7 @@
           <a:bodyPr wrap="square" rtlCol="0" anchor="ctr"/>
           <a:lstStyle/>
           <a:p>
-            <a:pPr indent="0" marL="0">
+            <a:pPr marL="0" indent="0">
               <a:buNone/>
             </a:pPr>
             <a:r>
@@ -12997,6 +13609,13 @@
             <a:prstDash val="solid"/>
           </a:ln>
         </p:spPr>
+        <p:txBody>
+          <a:bodyPr/>
+          <a:lstStyle/>
+          <a:p>
+            <a:endParaRPr lang="zh-CN" altLang="en-US"/>
+          </a:p>
+        </p:txBody>
       </p:sp>
       <p:sp>
         <p:nvSpPr>
@@ -13019,7 +13638,7 @@
           <a:bodyPr wrap="square" lIns="0" tIns="0" rIns="0" bIns="0" rtlCol="0" anchor="t"/>
           <a:lstStyle/>
           <a:p>
-            <a:pPr indent="0" marL="0">
+            <a:pPr marL="0" indent="0">
               <a:buNone/>
             </a:pPr>
             <a:r>
@@ -13036,7 +13655,7 @@
             <a:endParaRPr lang="en-US" sz="1000" dirty="0"/>
           </a:p>
           <a:p>
-            <a:pPr indent="0" marL="0">
+            <a:pPr marL="0" indent="0">
               <a:buNone/>
             </a:pPr>
             <a:r>
@@ -13053,7 +13672,7 @@
             <a:endParaRPr lang="en-US" sz="1000" dirty="0"/>
           </a:p>
           <a:p>
-            <a:pPr indent="0" marL="0">
+            <a:pPr marL="0" indent="0">
               <a:buNone/>
             </a:pPr>
             <a:r>
@@ -13070,7 +13689,7 @@
             <a:endParaRPr lang="en-US" sz="1000" dirty="0"/>
           </a:p>
           <a:p>
-            <a:pPr indent="0" marL="0">
+            <a:pPr marL="0" indent="0">
               <a:buNone/>
             </a:pPr>
             <a:r>
@@ -13109,7 +13728,7 @@
           <a:bodyPr wrap="square" rtlCol="0" anchor="ctr"/>
           <a:lstStyle/>
           <a:p>
-            <a:pPr indent="0" marL="0">
+            <a:pPr marL="0" indent="0">
               <a:buNone/>
             </a:pPr>
             <a:r>
@@ -13245,6 +13864,13 @@
             <a:prstDash val="solid"/>
           </a:ln>
         </p:spPr>
+        <p:txBody>
+          <a:bodyPr/>
+          <a:lstStyle/>
+          <a:p>
+            <a:endParaRPr lang="zh-CN" altLang="en-US"/>
+          </a:p>
+        </p:txBody>
       </p:sp>
       <p:sp>
         <p:nvSpPr>
@@ -13267,7 +13893,7 @@
           <a:bodyPr wrap="square" rtlCol="0" anchor="ctr"/>
           <a:lstStyle/>
           <a:p>
-            <a:pPr indent="0" marL="0">
+            <a:pPr marL="0" indent="0">
               <a:buNone/>
             </a:pPr>
             <a:r>
@@ -13309,6 +13935,13 @@
             <a:prstDash val="solid"/>
           </a:ln>
         </p:spPr>
+        <p:txBody>
+          <a:bodyPr/>
+          <a:lstStyle/>
+          <a:p>
+            <a:endParaRPr lang="zh-CN" altLang="en-US"/>
+          </a:p>
+        </p:txBody>
       </p:sp>
       <p:sp>
         <p:nvSpPr>
@@ -13331,7 +13964,7 @@
           <a:bodyPr wrap="square" lIns="0" tIns="0" rIns="0" bIns="0" rtlCol="0" anchor="t"/>
           <a:lstStyle/>
           <a:p>
-            <a:pPr indent="0" marL="0">
+            <a:pPr marL="0" indent="0">
               <a:buNone/>
             </a:pPr>
             <a:r>
@@ -13348,7 +13981,7 @@
             <a:endParaRPr lang="en-US" sz="1000" dirty="0"/>
           </a:p>
           <a:p>
-            <a:pPr indent="0" marL="0">
+            <a:pPr marL="0" indent="0">
               <a:buNone/>
             </a:pPr>
             <a:r>
@@ -13365,13 +13998,13 @@
             <a:endParaRPr lang="en-US" sz="1000" dirty="0"/>
           </a:p>
           <a:p>
-            <a:pPr indent="0" marL="0">
+            <a:pPr marL="0" indent="0">
               <a:buNone/>
             </a:pPr>
             <a:endParaRPr lang="en-US" sz="1000" dirty="0"/>
           </a:p>
           <a:p>
-            <a:pPr indent="0" marL="0">
+            <a:pPr marL="0" indent="0">
               <a:buNone/>
             </a:pPr>
             <a:r>
@@ -13388,7 +14021,7 @@
             <a:endParaRPr lang="en-US" sz="1000" dirty="0"/>
           </a:p>
           <a:p>
-            <a:pPr indent="0" marL="0">
+            <a:pPr marL="0" indent="0">
               <a:buNone/>
             </a:pPr>
             <a:r>
@@ -13405,7 +14038,7 @@
             <a:endParaRPr lang="en-US" sz="1000" dirty="0"/>
           </a:p>
           <a:p>
-            <a:pPr indent="0" marL="0">
+            <a:pPr marL="0" indent="0">
               <a:buNone/>
             </a:pPr>
             <a:r>
@@ -13422,7 +14055,7 @@
             <a:endParaRPr lang="en-US" sz="1000" dirty="0"/>
           </a:p>
           <a:p>
-            <a:pPr indent="0" marL="0">
+            <a:pPr marL="0" indent="0">
               <a:buNone/>
             </a:pPr>
             <a:r>
@@ -13439,13 +14072,13 @@
             <a:endParaRPr lang="en-US" sz="1000" dirty="0"/>
           </a:p>
           <a:p>
-            <a:pPr indent="0" marL="0">
+            <a:pPr marL="0" indent="0">
               <a:buNone/>
             </a:pPr>
             <a:endParaRPr lang="en-US" sz="1000" dirty="0"/>
           </a:p>
           <a:p>
-            <a:pPr indent="0" marL="0">
+            <a:pPr marL="0" indent="0">
               <a:buNone/>
             </a:pPr>
             <a:r>
@@ -13462,13 +14095,13 @@
             <a:endParaRPr lang="en-US" sz="1000" dirty="0"/>
           </a:p>
           <a:p>
-            <a:pPr indent="0" marL="0">
+            <a:pPr marL="0" indent="0">
               <a:buNone/>
             </a:pPr>
             <a:endParaRPr lang="en-US" sz="1000" dirty="0"/>
           </a:p>
           <a:p>
-            <a:pPr indent="0" marL="0">
+            <a:pPr marL="0" indent="0">
               <a:buNone/>
             </a:pPr>
             <a:r>
@@ -13510,6 +14143,13 @@
             <a:prstDash val="solid"/>
           </a:ln>
         </p:spPr>
+        <p:txBody>
+          <a:bodyPr/>
+          <a:lstStyle/>
+          <a:p>
+            <a:endParaRPr lang="zh-CN" altLang="en-US"/>
+          </a:p>
+        </p:txBody>
       </p:sp>
       <p:sp>
         <p:nvSpPr>
@@ -13532,7 +14172,7 @@
           <a:bodyPr wrap="square" rtlCol="0" anchor="ctr"/>
           <a:lstStyle/>
           <a:p>
-            <a:pPr indent="0" marL="0">
+            <a:pPr marL="0" indent="0">
               <a:buNone/>
             </a:pPr>
             <a:r>
@@ -13566,6 +14206,7 @@
         <a:solidFill>
           <a:srgbClr val="F8FAFC"/>
         </a:solidFill>
+        <a:effectLst/>
       </p:bgPr>
     </p:bg>
     <p:spTree>
@@ -13606,6 +14247,13 @@
             <a:prstDash val="solid"/>
           </a:ln>
         </p:spPr>
+        <p:txBody>
+          <a:bodyPr/>
+          <a:lstStyle/>
+          <a:p>
+            <a:endParaRPr lang="zh-CN" altLang="en-US"/>
+          </a:p>
+        </p:txBody>
       </p:sp>
       <p:sp>
         <p:nvSpPr>
@@ -13628,7 +14276,7 @@
           <a:bodyPr wrap="square" lIns="0" tIns="0" rIns="0" bIns="0" rtlCol="0" anchor="ctr"/>
           <a:lstStyle/>
           <a:p>
-            <a:pPr indent="0" marL="0">
+            <a:pPr marL="0" indent="0">
               <a:buNone/>
             </a:pPr>
             <a:r>
@@ -13668,6 +14316,13 @@
             <a:prstDash val="solid"/>
           </a:ln>
         </p:spPr>
+        <p:txBody>
+          <a:bodyPr/>
+          <a:lstStyle/>
+          <a:p>
+            <a:endParaRPr lang="zh-CN" altLang="en-US"/>
+          </a:p>
+        </p:txBody>
       </p:sp>
       <p:sp>
         <p:nvSpPr>
@@ -13690,7 +14345,7 @@
           <a:bodyPr wrap="square" rtlCol="0" anchor="ctr"/>
           <a:lstStyle/>
           <a:p>
-            <a:pPr indent="0" marL="0">
+            <a:pPr marL="0" indent="0">
               <a:buNone/>
             </a:pPr>
             <a:r>
@@ -13732,6 +14387,13 @@
             <a:prstDash val="solid"/>
           </a:ln>
         </p:spPr>
+        <p:txBody>
+          <a:bodyPr/>
+          <a:lstStyle/>
+          <a:p>
+            <a:endParaRPr lang="zh-CN" altLang="en-US"/>
+          </a:p>
+        </p:txBody>
       </p:sp>
       <p:sp>
         <p:nvSpPr>
@@ -13754,7 +14416,7 @@
           <a:bodyPr wrap="square" lIns="0" tIns="0" rIns="0" bIns="0" rtlCol="0" anchor="ctr"/>
           <a:lstStyle/>
           <a:p>
-            <a:pPr indent="0" marL="0">
+            <a:pPr marL="0" indent="0">
               <a:buNone/>
             </a:pPr>
             <a:r>
@@ -13796,6 +14458,13 @@
             <a:prstDash val="solid"/>
           </a:ln>
         </p:spPr>
+        <p:txBody>
+          <a:bodyPr/>
+          <a:lstStyle/>
+          <a:p>
+            <a:endParaRPr lang="zh-CN" altLang="en-US"/>
+          </a:p>
+        </p:txBody>
       </p:sp>
       <p:sp>
         <p:nvSpPr>
@@ -13818,7 +14487,7 @@
           <a:bodyPr wrap="square" rtlCol="0" anchor="ctr"/>
           <a:lstStyle/>
           <a:p>
-            <a:pPr indent="0" marL="0">
+            <a:pPr marL="0" indent="0">
               <a:buNone/>
             </a:pPr>
             <a:r>
@@ -13860,6 +14529,13 @@
             <a:prstDash val="solid"/>
           </a:ln>
         </p:spPr>
+        <p:txBody>
+          <a:bodyPr/>
+          <a:lstStyle/>
+          <a:p>
+            <a:endParaRPr lang="zh-CN" altLang="en-US"/>
+          </a:p>
+        </p:txBody>
       </p:sp>
       <p:sp>
         <p:nvSpPr>
@@ -13882,7 +14558,7 @@
           <a:bodyPr wrap="square" lIns="0" tIns="0" rIns="0" bIns="0" rtlCol="0" anchor="t"/>
           <a:lstStyle/>
           <a:p>
-            <a:pPr indent="0" marL="0">
+            <a:pPr marL="0" indent="0">
               <a:buNone/>
             </a:pPr>
             <a:r>
@@ -13899,7 +14575,7 @@
             <a:endParaRPr lang="en-US" sz="1000" dirty="0"/>
           </a:p>
           <a:p>
-            <a:pPr indent="0" marL="0">
+            <a:pPr marL="0" indent="0">
               <a:buNone/>
             </a:pPr>
             <a:r>
@@ -13916,7 +14592,7 @@
             <a:endParaRPr lang="en-US" sz="1000" dirty="0"/>
           </a:p>
           <a:p>
-            <a:pPr indent="0" marL="0">
+            <a:pPr marL="0" indent="0">
               <a:buNone/>
             </a:pPr>
             <a:r>
@@ -13933,7 +14609,7 @@
             <a:endParaRPr lang="en-US" sz="1000" dirty="0"/>
           </a:p>
           <a:p>
-            <a:pPr indent="0" marL="0">
+            <a:pPr marL="0" indent="0">
               <a:buNone/>
             </a:pPr>
             <a:r>
@@ -13975,6 +14651,13 @@
             <a:prstDash val="solid"/>
           </a:ln>
         </p:spPr>
+        <p:txBody>
+          <a:bodyPr/>
+          <a:lstStyle/>
+          <a:p>
+            <a:endParaRPr lang="zh-CN" altLang="en-US"/>
+          </a:p>
+        </p:txBody>
       </p:sp>
       <p:sp>
         <p:nvSpPr>
@@ -13997,7 +14680,7 @@
           <a:bodyPr wrap="square" rtlCol="0" anchor="ctr"/>
           <a:lstStyle/>
           <a:p>
-            <a:pPr indent="0" marL="0">
+            <a:pPr marL="0" indent="0">
               <a:buNone/>
             </a:pPr>
             <a:r>
@@ -14039,6 +14722,13 @@
             <a:prstDash val="solid"/>
           </a:ln>
         </p:spPr>
+        <p:txBody>
+          <a:bodyPr/>
+          <a:lstStyle/>
+          <a:p>
+            <a:endParaRPr lang="zh-CN" altLang="en-US"/>
+          </a:p>
+        </p:txBody>
       </p:sp>
       <p:sp>
         <p:nvSpPr>
@@ -14061,7 +14751,7 @@
           <a:bodyPr wrap="square" lIns="0" tIns="0" rIns="0" bIns="0" rtlCol="0" anchor="t"/>
           <a:lstStyle/>
           <a:p>
-            <a:pPr indent="0" marL="0">
+            <a:pPr marL="0" indent="0">
               <a:buNone/>
             </a:pPr>
             <a:r>
@@ -14078,7 +14768,7 @@
             <a:endParaRPr lang="en-US" sz="1000" dirty="0"/>
           </a:p>
           <a:p>
-            <a:pPr indent="0" marL="0">
+            <a:pPr marL="0" indent="0">
               <a:buNone/>
             </a:pPr>
             <a:r>
@@ -14095,7 +14785,7 @@
             <a:endParaRPr lang="en-US" sz="1000" dirty="0"/>
           </a:p>
           <a:p>
-            <a:pPr indent="0" marL="0">
+            <a:pPr marL="0" indent="0">
               <a:buNone/>
             </a:pPr>
             <a:r>
@@ -14112,7 +14802,7 @@
             <a:endParaRPr lang="en-US" sz="1000" dirty="0"/>
           </a:p>
           <a:p>
-            <a:pPr indent="0" marL="0">
+            <a:pPr marL="0" indent="0">
               <a:buNone/>
             </a:pPr>
             <a:r>
@@ -14138,7 +14828,7 @@
         </p:nvSpPr>
         <p:spPr>
           <a:xfrm>
-            <a:off x="3383280" y="2304288"/>
+            <a:off x="2491740" y="1901952"/>
             <a:ext cx="2377440" cy="320040"/>
           </a:xfrm>
           <a:prstGeom prst="rect">
@@ -14154,6 +14844,13 @@
             <a:prstDash val="solid"/>
           </a:ln>
         </p:spPr>
+        <p:txBody>
+          <a:bodyPr/>
+          <a:lstStyle/>
+          <a:p>
+            <a:endParaRPr lang="zh-CN" altLang="en-US"/>
+          </a:p>
+        </p:txBody>
       </p:sp>
       <p:sp>
         <p:nvSpPr>
@@ -14163,7 +14860,7 @@
         </p:nvSpPr>
         <p:spPr>
           <a:xfrm>
-            <a:off x="3383280" y="2304288"/>
+            <a:off x="2514600" y="1883664"/>
             <a:ext cx="2377440" cy="320040"/>
           </a:xfrm>
           <a:prstGeom prst="rect">
@@ -14176,7 +14873,7 @@
           <a:bodyPr wrap="square" lIns="0" tIns="0" rIns="0" bIns="0" rtlCol="0" anchor="ctr"/>
           <a:lstStyle/>
           <a:p>
-            <a:pPr algn="ctr" indent="0" marL="0">
+            <a:pPr marL="0" indent="0" algn="ctr">
               <a:buNone/>
             </a:pPr>
             <a:r>
@@ -14218,6 +14915,13 @@
             <a:prstDash val="solid"/>
           </a:ln>
         </p:spPr>
+        <p:txBody>
+          <a:bodyPr/>
+          <a:lstStyle/>
+          <a:p>
+            <a:endParaRPr lang="zh-CN" altLang="en-US"/>
+          </a:p>
+        </p:txBody>
       </p:sp>
       <p:sp>
         <p:nvSpPr>
@@ -14240,7 +14944,7 @@
           <a:bodyPr wrap="square" lIns="0" tIns="0" rIns="0" bIns="0" rtlCol="0" anchor="ctr"/>
           <a:lstStyle/>
           <a:p>
-            <a:pPr indent="0" marL="0">
+            <a:pPr marL="0" indent="0">
               <a:buNone/>
             </a:pPr>
             <a:r>
@@ -14282,6 +14986,13 @@
             <a:prstDash val="solid"/>
           </a:ln>
         </p:spPr>
+        <p:txBody>
+          <a:bodyPr/>
+          <a:lstStyle/>
+          <a:p>
+            <a:endParaRPr lang="zh-CN" altLang="en-US"/>
+          </a:p>
+        </p:txBody>
       </p:sp>
       <p:sp>
         <p:nvSpPr>
@@ -14304,7 +15015,7 @@
           <a:bodyPr wrap="square" rtlCol="0" anchor="ctr"/>
           <a:lstStyle/>
           <a:p>
-            <a:pPr indent="0" marL="0">
+            <a:pPr marL="0" indent="0">
               <a:buNone/>
             </a:pPr>
             <a:r>
@@ -14343,7 +15054,7 @@
           <a:bodyPr wrap="square" rtlCol="0" anchor="ctr"/>
           <a:lstStyle/>
           <a:p>
-            <a:pPr indent="0" marL="0">
+            <a:pPr marL="0" indent="0">
               <a:buNone/>
             </a:pPr>
             <a:r>
@@ -14360,7 +15071,7 @@
             <a:endParaRPr lang="en-US" sz="1050" dirty="0"/>
           </a:p>
           <a:p>
-            <a:pPr indent="0" marL="0">
+            <a:pPr marL="0" indent="0">
               <a:buNone/>
             </a:pPr>
             <a:r>
@@ -14402,6 +15113,13 @@
             <a:prstDash val="solid"/>
           </a:ln>
         </p:spPr>
+        <p:txBody>
+          <a:bodyPr/>
+          <a:lstStyle/>
+          <a:p>
+            <a:endParaRPr lang="zh-CN" altLang="en-US"/>
+          </a:p>
+        </p:txBody>
       </p:sp>
       <p:sp>
         <p:nvSpPr>
@@ -14424,7 +15142,7 @@
           <a:bodyPr wrap="square" rtlCol="0" anchor="ctr"/>
           <a:lstStyle/>
           <a:p>
-            <a:pPr indent="0" marL="0">
+            <a:pPr marL="0" indent="0">
               <a:buNone/>
             </a:pPr>
             <a:r>
@@ -14463,7 +15181,7 @@
           <a:bodyPr wrap="square" rtlCol="0" anchor="ctr"/>
           <a:lstStyle/>
           <a:p>
-            <a:pPr indent="0" marL="0">
+            <a:pPr marL="0" indent="0">
               <a:buNone/>
             </a:pPr>
             <a:r>
@@ -14480,7 +15198,7 @@
             <a:endParaRPr lang="en-US" sz="1050" dirty="0"/>
           </a:p>
           <a:p>
-            <a:pPr indent="0" marL="0">
+            <a:pPr marL="0" indent="0">
               <a:buNone/>
             </a:pPr>
             <a:r>
@@ -14514,6 +15232,7 @@
         <a:solidFill>
           <a:srgbClr val="F8FAFC"/>
         </a:solidFill>
+        <a:effectLst/>
       </p:bgPr>
     </p:bg>
     <p:spTree>
@@ -14554,6 +15273,13 @@
             <a:prstDash val="solid"/>
           </a:ln>
         </p:spPr>
+        <p:txBody>
+          <a:bodyPr/>
+          <a:lstStyle/>
+          <a:p>
+            <a:endParaRPr lang="zh-CN" altLang="en-US"/>
+          </a:p>
+        </p:txBody>
       </p:sp>
       <p:sp>
         <p:nvSpPr>
@@ -14576,7 +15302,7 @@
           <a:bodyPr wrap="square" lIns="0" tIns="0" rIns="0" bIns="0" rtlCol="0" anchor="ctr"/>
           <a:lstStyle/>
           <a:p>
-            <a:pPr indent="0" marL="0">
+            <a:pPr marL="0" indent="0">
               <a:buNone/>
             </a:pPr>
             <a:r>
@@ -14616,6 +15342,13 @@
             <a:prstDash val="solid"/>
           </a:ln>
         </p:spPr>
+        <p:txBody>
+          <a:bodyPr/>
+          <a:lstStyle/>
+          <a:p>
+            <a:endParaRPr lang="zh-CN" altLang="en-US"/>
+          </a:p>
+        </p:txBody>
       </p:sp>
       <p:sp>
         <p:nvSpPr>
@@ -14641,6 +15374,13 @@
             <a:prstDash val="solid"/>
           </a:ln>
         </p:spPr>
+        <p:txBody>
+          <a:bodyPr/>
+          <a:lstStyle/>
+          <a:p>
+            <a:endParaRPr lang="zh-CN" altLang="en-US"/>
+          </a:p>
+        </p:txBody>
       </p:sp>
       <p:sp>
         <p:nvSpPr>
@@ -14663,7 +15403,7 @@
           <a:bodyPr wrap="square" rtlCol="0" anchor="ctr"/>
           <a:lstStyle/>
           <a:p>
-            <a:pPr indent="0" marL="0">
+            <a:pPr marL="0" indent="0">
               <a:buNone/>
             </a:pPr>
             <a:r>
@@ -14702,7 +15442,7 @@
           <a:bodyPr wrap="square" rtlCol="0" anchor="ctr"/>
           <a:lstStyle/>
           <a:p>
-            <a:pPr indent="0" marL="0">
+            <a:pPr marL="0" indent="0">
               <a:buNone/>
             </a:pPr>
             <a:r>
@@ -14744,6 +15484,13 @@
             <a:prstDash val="solid"/>
           </a:ln>
         </p:spPr>
+        <p:txBody>
+          <a:bodyPr/>
+          <a:lstStyle/>
+          <a:p>
+            <a:endParaRPr lang="zh-CN" altLang="en-US"/>
+          </a:p>
+        </p:txBody>
       </p:sp>
       <p:sp>
         <p:nvSpPr>
@@ -14766,7 +15513,7 @@
           <a:bodyPr wrap="square" lIns="0" tIns="0" rIns="0" bIns="0" rtlCol="0" anchor="t"/>
           <a:lstStyle/>
           <a:p>
-            <a:pPr indent="0" marL="0">
+            <a:pPr marL="0" indent="0">
               <a:buNone/>
             </a:pPr>
             <a:r>
@@ -14783,7 +15530,7 @@
             <a:endParaRPr lang="en-US" sz="1000" dirty="0"/>
           </a:p>
           <a:p>
-            <a:pPr indent="0" marL="0">
+            <a:pPr marL="0" indent="0">
               <a:buNone/>
             </a:pPr>
             <a:r>
@@ -14800,7 +15547,7 @@
             <a:endParaRPr lang="en-US" sz="1000" dirty="0"/>
           </a:p>
           <a:p>
-            <a:pPr indent="0" marL="0">
+            <a:pPr marL="0" indent="0">
               <a:buNone/>
             </a:pPr>
             <a:r>
@@ -14954,6 +15701,13 @@
             <a:prstDash val="solid"/>
           </a:ln>
         </p:spPr>
+        <p:txBody>
+          <a:bodyPr/>
+          <a:lstStyle/>
+          <a:p>
+            <a:endParaRPr lang="zh-CN" altLang="en-US"/>
+          </a:p>
+        </p:txBody>
       </p:sp>
       <p:sp>
         <p:nvSpPr>
@@ -14976,7 +15730,7 @@
           <a:bodyPr wrap="square" rtlCol="0" anchor="ctr"/>
           <a:lstStyle/>
           <a:p>
-            <a:pPr indent="0" marL="0">
+            <a:pPr marL="0" indent="0">
               <a:buNone/>
             </a:pPr>
             <a:r>
@@ -15018,6 +15772,13 @@
             <a:prstDash val="solid"/>
           </a:ln>
         </p:spPr>
+        <p:txBody>
+          <a:bodyPr/>
+          <a:lstStyle/>
+          <a:p>
+            <a:endParaRPr lang="zh-CN" altLang="en-US"/>
+          </a:p>
+        </p:txBody>
       </p:sp>
       <p:sp>
         <p:nvSpPr>
@@ -15040,7 +15801,7 @@
           <a:bodyPr wrap="square" lIns="0" tIns="0" rIns="0" bIns="0" rtlCol="0" anchor="t"/>
           <a:lstStyle/>
           <a:p>
-            <a:pPr indent="0" marL="0">
+            <a:pPr marL="0" indent="0">
               <a:buNone/>
             </a:pPr>
             <a:r>
@@ -15057,13 +15818,13 @@
             <a:endParaRPr lang="en-US" sz="1000" dirty="0"/>
           </a:p>
           <a:p>
-            <a:pPr indent="0" marL="0">
+            <a:pPr marL="0" indent="0">
               <a:buNone/>
             </a:pPr>
             <a:endParaRPr lang="en-US" sz="1000" dirty="0"/>
           </a:p>
           <a:p>
-            <a:pPr indent="0" marL="0">
+            <a:pPr marL="0" indent="0">
               <a:buNone/>
             </a:pPr>
             <a:r>
@@ -15080,7 +15841,7 @@
             <a:endParaRPr lang="en-US" sz="1000" dirty="0"/>
           </a:p>
           <a:p>
-            <a:pPr indent="0" marL="0">
+            <a:pPr marL="0" indent="0">
               <a:buNone/>
             </a:pPr>
             <a:r>
@@ -15097,13 +15858,13 @@
             <a:endParaRPr lang="en-US" sz="1000" dirty="0"/>
           </a:p>
           <a:p>
-            <a:pPr indent="0" marL="0">
+            <a:pPr marL="0" indent="0">
               <a:buNone/>
             </a:pPr>
             <a:endParaRPr lang="en-US" sz="1000" dirty="0"/>
           </a:p>
           <a:p>
-            <a:pPr indent="0" marL="0">
+            <a:pPr marL="0" indent="0">
               <a:buNone/>
             </a:pPr>
             <a:r>
@@ -15120,7 +15881,7 @@
             <a:endParaRPr lang="en-US" sz="1000" dirty="0"/>
           </a:p>
           <a:p>
-            <a:pPr indent="0" marL="0">
+            <a:pPr marL="0" indent="0">
               <a:buNone/>
             </a:pPr>
             <a:r>
@@ -15137,13 +15898,13 @@
             <a:endParaRPr lang="en-US" sz="1000" dirty="0"/>
           </a:p>
           <a:p>
-            <a:pPr indent="0" marL="0">
+            <a:pPr marL="0" indent="0">
               <a:buNone/>
             </a:pPr>
             <a:endParaRPr lang="en-US" sz="1000" dirty="0"/>
           </a:p>
           <a:p>
-            <a:pPr indent="0" marL="0">
+            <a:pPr marL="0" indent="0">
               <a:buNone/>
             </a:pPr>
             <a:r>
@@ -15185,6 +15946,13 @@
             <a:prstDash val="solid"/>
           </a:ln>
         </p:spPr>
+        <p:txBody>
+          <a:bodyPr/>
+          <a:lstStyle/>
+          <a:p>
+            <a:endParaRPr lang="zh-CN" altLang="en-US"/>
+          </a:p>
+        </p:txBody>
       </p:sp>
       <p:sp>
         <p:nvSpPr>
@@ -15207,7 +15975,7 @@
           <a:bodyPr wrap="square" rtlCol="0" anchor="ctr"/>
           <a:lstStyle/>
           <a:p>
-            <a:pPr algn="ctr" indent="0" marL="0">
+            <a:pPr marL="0" indent="0" algn="ctr">
               <a:buNone/>
             </a:pPr>
             <a:r>
@@ -15221,9 +15989,6 @@
               </a:rPr>
               <a:t>Exact match (B-tree):  </a:t>
             </a:r>
-            <a:pPr algn="ctr" indent="0" marL="0">
-              <a:buNone/>
-            </a:pPr>
             <a:r>
               <a:rPr lang="en-US" sz="1150" b="1" dirty="0">
                 <a:solidFill>
@@ -15235,9 +16000,6 @@
               </a:rPr>
               <a:t>0.053 ms</a:t>
             </a:r>
-            <a:pPr algn="ctr" indent="0" marL="0">
-              <a:buNone/>
-            </a:pPr>
             <a:r>
               <a:rPr lang="en-US" sz="1150" dirty="0">
                 <a:solidFill>
@@ -15249,9 +16011,6 @@
               </a:rPr>
               <a:t>   |   Fuzzy ILIKE:  </a:t>
             </a:r>
-            <a:pPr algn="ctr" indent="0" marL="0">
-              <a:buNone/>
-            </a:pPr>
             <a:r>
               <a:rPr lang="en-US" sz="1150" b="1" dirty="0">
                 <a:solidFill>
@@ -15263,13 +16022,10 @@
               </a:rPr>
               <a:t>14.2 ms</a:t>
             </a:r>
-            <a:pPr algn="ctr" indent="0" marL="0">
-              <a:buNone/>
-            </a:pPr>
             <a:endParaRPr lang="en-US" sz="1150" dirty="0"/>
           </a:p>
           <a:p>
-            <a:pPr algn="ctr" indent="0" marL="0">
+            <a:pPr marL="0" indent="0" algn="ctr">
               <a:buNone/>
             </a:pPr>
             <a:r>
@@ -15303,6 +16059,7 @@
         <a:solidFill>
           <a:srgbClr val="0F172A"/>
         </a:solidFill>
+        <a:effectLst/>
       </p:bgPr>
     </p:bg>
     <p:spTree>
@@ -15343,6 +16100,13 @@
             <a:prstDash val="solid"/>
           </a:ln>
         </p:spPr>
+        <p:txBody>
+          <a:bodyPr/>
+          <a:lstStyle/>
+          <a:p>
+            <a:endParaRPr lang="zh-CN" altLang="en-US"/>
+          </a:p>
+        </p:txBody>
       </p:sp>
       <p:sp>
         <p:nvSpPr>
@@ -15365,7 +16129,7 @@
           <a:bodyPr wrap="square" rtlCol="0" anchor="ctr"/>
           <a:lstStyle/>
           <a:p>
-            <a:pPr indent="0" marL="0">
+            <a:pPr marL="0" indent="0">
               <a:buNone/>
             </a:pPr>
             <a:r>
@@ -15405,6 +16169,13 @@
             <a:prstDash val="solid"/>
           </a:ln>
         </p:spPr>
+        <p:txBody>
+          <a:bodyPr/>
+          <a:lstStyle/>
+          <a:p>
+            <a:endParaRPr lang="zh-CN" altLang="en-US"/>
+          </a:p>
+        </p:txBody>
       </p:sp>
       <p:sp>
         <p:nvSpPr>
@@ -15427,7 +16198,7 @@
           <a:bodyPr wrap="square" rtlCol="0" anchor="ctr"/>
           <a:lstStyle/>
           <a:p>
-            <a:pPr indent="0" marL="0">
+            <a:pPr marL="0" indent="0">
               <a:buNone/>
             </a:pPr>
             <a:r>
@@ -15469,6 +16240,13 @@
             <a:prstDash val="solid"/>
           </a:ln>
         </p:spPr>
+        <p:txBody>
+          <a:bodyPr/>
+          <a:lstStyle/>
+          <a:p>
+            <a:endParaRPr lang="zh-CN" altLang="en-US"/>
+          </a:p>
+        </p:txBody>
       </p:sp>
       <p:sp>
         <p:nvSpPr>
@@ -15494,6 +16272,13 @@
             <a:prstDash val="solid"/>
           </a:ln>
         </p:spPr>
+        <p:txBody>
+          <a:bodyPr/>
+          <a:lstStyle/>
+          <a:p>
+            <a:endParaRPr lang="zh-CN" altLang="en-US"/>
+          </a:p>
+        </p:txBody>
       </p:sp>
       <p:sp>
         <p:nvSpPr>
@@ -15516,7 +16301,7 @@
           <a:bodyPr wrap="square" lIns="0" tIns="0" rIns="0" bIns="0" rtlCol="0" anchor="ctr"/>
           <a:lstStyle/>
           <a:p>
-            <a:pPr indent="0" marL="0">
+            <a:pPr marL="0" indent="0">
               <a:buNone/>
             </a:pPr>
             <a:r>
@@ -15555,7 +16340,7 @@
           <a:bodyPr wrap="square" rtlCol="0" anchor="ctr"/>
           <a:lstStyle/>
           <a:p>
-            <a:pPr indent="0" marL="0">
+            <a:pPr marL="0" indent="0">
               <a:buNone/>
             </a:pPr>
             <a:r>
@@ -15594,7 +16379,7 @@
           <a:bodyPr wrap="square" rtlCol="0" anchor="ctr"/>
           <a:lstStyle/>
           <a:p>
-            <a:pPr indent="0" marL="0">
+            <a:pPr marL="0" indent="0">
               <a:buNone/>
             </a:pPr>
             <a:r>
@@ -15633,7 +16418,7 @@
           <a:bodyPr wrap="square" rtlCol="0" anchor="ctr"/>
           <a:lstStyle/>
           <a:p>
-            <a:pPr indent="0" marL="0">
+            <a:pPr marL="0" indent="0">
               <a:buNone/>
             </a:pPr>
             <a:r>
@@ -15672,7 +16457,7 @@
           <a:bodyPr wrap="square" rtlCol="0" anchor="ctr"/>
           <a:lstStyle/>
           <a:p>
-            <a:pPr indent="0" marL="0">
+            <a:pPr marL="0" indent="0">
               <a:buNone/>
             </a:pPr>
             <a:r>
@@ -15711,7 +16496,7 @@
           <a:bodyPr wrap="square" rtlCol="0" anchor="ctr"/>
           <a:lstStyle/>
           <a:p>
-            <a:pPr indent="0" marL="0">
+            <a:pPr marL="0" indent="0">
               <a:buNone/>
             </a:pPr>
             <a:r>
@@ -15753,6 +16538,13 @@
             <a:prstDash val="solid"/>
           </a:ln>
         </p:spPr>
+        <p:txBody>
+          <a:bodyPr/>
+          <a:lstStyle/>
+          <a:p>
+            <a:endParaRPr lang="zh-CN" altLang="en-US"/>
+          </a:p>
+        </p:txBody>
       </p:sp>
       <p:sp>
         <p:nvSpPr>
@@ -15778,6 +16570,13 @@
             <a:prstDash val="solid"/>
           </a:ln>
         </p:spPr>
+        <p:txBody>
+          <a:bodyPr/>
+          <a:lstStyle/>
+          <a:p>
+            <a:endParaRPr lang="zh-CN" altLang="en-US"/>
+          </a:p>
+        </p:txBody>
       </p:sp>
       <p:sp>
         <p:nvSpPr>
@@ -15800,7 +16599,7 @@
           <a:bodyPr wrap="square" lIns="0" tIns="0" rIns="0" bIns="0" rtlCol="0" anchor="ctr"/>
           <a:lstStyle/>
           <a:p>
-            <a:pPr indent="0" marL="0">
+            <a:pPr marL="0" indent="0">
               <a:buNone/>
             </a:pPr>
             <a:r>
@@ -15839,7 +16638,7 @@
           <a:bodyPr wrap="square" rtlCol="0" anchor="ctr"/>
           <a:lstStyle/>
           <a:p>
-            <a:pPr indent="0" marL="0">
+            <a:pPr marL="0" indent="0">
               <a:buNone/>
             </a:pPr>
             <a:r>
@@ -15878,7 +16677,7 @@
           <a:bodyPr wrap="square" rtlCol="0" anchor="ctr"/>
           <a:lstStyle/>
           <a:p>
-            <a:pPr indent="0" marL="0">
+            <a:pPr marL="0" indent="0">
               <a:buNone/>
             </a:pPr>
             <a:r>
@@ -15917,7 +16716,7 @@
           <a:bodyPr wrap="square" rtlCol="0" anchor="ctr"/>
           <a:lstStyle/>
           <a:p>
-            <a:pPr indent="0" marL="0">
+            <a:pPr marL="0" indent="0">
               <a:buNone/>
             </a:pPr>
             <a:r>
@@ -15956,7 +16755,7 @@
           <a:bodyPr wrap="square" rtlCol="0" anchor="ctr"/>
           <a:lstStyle/>
           <a:p>
-            <a:pPr indent="0" marL="0">
+            <a:pPr marL="0" indent="0">
               <a:buNone/>
             </a:pPr>
             <a:r>
@@ -15995,7 +16794,7 @@
           <a:bodyPr wrap="square" rtlCol="0" anchor="ctr"/>
           <a:lstStyle/>
           <a:p>
-            <a:pPr indent="0" marL="0">
+            <a:pPr marL="0" indent="0">
               <a:buNone/>
             </a:pPr>
             <a:r>
@@ -16037,6 +16836,13 @@
             <a:prstDash val="solid"/>
           </a:ln>
         </p:spPr>
+        <p:txBody>
+          <a:bodyPr/>
+          <a:lstStyle/>
+          <a:p>
+            <a:endParaRPr lang="zh-CN" altLang="en-US"/>
+          </a:p>
+        </p:txBody>
       </p:sp>
       <p:sp>
         <p:nvSpPr>
@@ -16062,6 +16868,13 @@
             <a:prstDash val="solid"/>
           </a:ln>
         </p:spPr>
+        <p:txBody>
+          <a:bodyPr/>
+          <a:lstStyle/>
+          <a:p>
+            <a:endParaRPr lang="zh-CN" altLang="en-US"/>
+          </a:p>
+        </p:txBody>
       </p:sp>
       <p:sp>
         <p:nvSpPr>
@@ -16084,7 +16897,7 @@
           <a:bodyPr wrap="square" lIns="0" tIns="0" rIns="0" bIns="0" rtlCol="0" anchor="ctr"/>
           <a:lstStyle/>
           <a:p>
-            <a:pPr indent="0" marL="0">
+            <a:pPr marL="0" indent="0">
               <a:buNone/>
             </a:pPr>
             <a:r>
@@ -16123,7 +16936,7 @@
           <a:bodyPr wrap="square" rtlCol="0" anchor="ctr"/>
           <a:lstStyle/>
           <a:p>
-            <a:pPr indent="0" marL="0">
+            <a:pPr marL="0" indent="0">
               <a:buNone/>
             </a:pPr>
             <a:r>
@@ -16162,7 +16975,7 @@
           <a:bodyPr wrap="square" rtlCol="0" anchor="ctr"/>
           <a:lstStyle/>
           <a:p>
-            <a:pPr indent="0" marL="0">
+            <a:pPr marL="0" indent="0">
               <a:buNone/>
             </a:pPr>
             <a:r>
@@ -16201,7 +17014,7 @@
           <a:bodyPr wrap="square" rtlCol="0" anchor="ctr"/>
           <a:lstStyle/>
           <a:p>
-            <a:pPr indent="0" marL="0">
+            <a:pPr marL="0" indent="0">
               <a:buNone/>
             </a:pPr>
             <a:r>
@@ -16240,7 +17053,7 @@
           <a:bodyPr wrap="square" rtlCol="0" anchor="ctr"/>
           <a:lstStyle/>
           <a:p>
-            <a:pPr indent="0" marL="0">
+            <a:pPr marL="0" indent="0">
               <a:buNone/>
             </a:pPr>
             <a:r>
@@ -16279,7 +17092,7 @@
           <a:bodyPr wrap="square" rtlCol="0" anchor="ctr"/>
           <a:lstStyle/>
           <a:p>
-            <a:pPr indent="0" marL="0">
+            <a:pPr marL="0" indent="0">
               <a:buNone/>
             </a:pPr>
             <a:r>
@@ -16318,7 +17131,7 @@
           <a:bodyPr wrap="square" rtlCol="0" anchor="ctr"/>
           <a:lstStyle/>
           <a:p>
-            <a:pPr algn="ctr" indent="0" marL="0">
+            <a:pPr marL="0" indent="0" algn="ctr">
               <a:buNone/>
             </a:pPr>
             <a:r>
@@ -16354,7 +17167,7 @@
           <a:bodyPr wrap="square" rtlCol="0" anchor="ctr"/>
           <a:lstStyle/>
           <a:p>
-            <a:pPr algn="ctr" indent="0" marL="0">
+            <a:pPr marL="0" indent="0" algn="ctr">
               <a:buNone/>
             </a:pPr>
             <a:r>
@@ -16393,6 +17206,13 @@
             <a:prstDash val="solid"/>
           </a:ln>
         </p:spPr>
+        <p:txBody>
+          <a:bodyPr/>
+          <a:lstStyle/>
+          <a:p>
+            <a:endParaRPr lang="zh-CN" altLang="en-US"/>
+          </a:p>
+        </p:txBody>
       </p:sp>
       <p:sp>
         <p:nvSpPr>
@@ -16415,7 +17235,7 @@
           <a:bodyPr wrap="square" lIns="0" tIns="0" rIns="0" bIns="0" rtlCol="0" anchor="ctr"/>
           <a:lstStyle/>
           <a:p>
-            <a:pPr algn="ctr" indent="0" marL="0">
+            <a:pPr marL="0" indent="0" algn="ctr">
               <a:buNone/>
             </a:pPr>
             <a:r>
@@ -16734,4 +17554,319 @@
     </a:ext>
   </a:extLst>
 </a:theme>
+</file>
+
+<file path=ppt/theme/theme2.xml><?xml version="1.0" encoding="utf-8"?>
+<a:theme xmlns:a="http://schemas.openxmlformats.org/drawingml/2006/main" name="Office 主题​​">
+  <a:themeElements>
+    <a:clrScheme name="Office">
+      <a:dk1>
+        <a:sysClr val="windowText" lastClr="000000"/>
+      </a:dk1>
+      <a:lt1>
+        <a:sysClr val="window" lastClr="FFFFFF"/>
+      </a:lt1>
+      <a:dk2>
+        <a:srgbClr val="0E2841"/>
+      </a:dk2>
+      <a:lt2>
+        <a:srgbClr val="E8E8E8"/>
+      </a:lt2>
+      <a:accent1>
+        <a:srgbClr val="156082"/>
+      </a:accent1>
+      <a:accent2>
+        <a:srgbClr val="E97132"/>
+      </a:accent2>
+      <a:accent3>
+        <a:srgbClr val="196B24"/>
+      </a:accent3>
+      <a:accent4>
+        <a:srgbClr val="0F9ED5"/>
+      </a:accent4>
+      <a:accent5>
+        <a:srgbClr val="A02B93"/>
+      </a:accent5>
+      <a:accent6>
+        <a:srgbClr val="4EA72E"/>
+      </a:accent6>
+      <a:hlink>
+        <a:srgbClr val="467886"/>
+      </a:hlink>
+      <a:folHlink>
+        <a:srgbClr val="96607D"/>
+      </a:folHlink>
+    </a:clrScheme>
+    <a:fontScheme name="Office">
+      <a:majorFont>
+        <a:latin typeface="等线 Light" panose="02110004020202020204"/>
+        <a:ea typeface=""/>
+        <a:cs typeface=""/>
+        <a:font script="Jpan" typeface="游ゴシック Light"/>
+        <a:font script="Hang" typeface="맑은 고딕"/>
+        <a:font script="Hans" typeface="等线 Light"/>
+        <a:font script="Hant" typeface="新細明體"/>
+        <a:font script="Arab" typeface="Times New Roman"/>
+        <a:font script="Hebr" typeface="Times New Roman"/>
+        <a:font script="Thai" typeface="Angsana New"/>
+        <a:font script="Ethi" typeface="Nyala"/>
+        <a:font script="Beng" typeface="Vrinda"/>
+        <a:font script="Gujr" typeface="Shruti"/>
+        <a:font script="Khmr" typeface="MoolBoran"/>
+        <a:font script="Knda" typeface="Tunga"/>
+        <a:font script="Guru" typeface="Raavi"/>
+        <a:font script="Cans" typeface="Euphemia"/>
+        <a:font script="Cher" typeface="Plantagenet Cherokee"/>
+        <a:font script="Yiii" typeface="Microsoft Yi Baiti"/>
+        <a:font script="Tibt" typeface="Microsoft Himalaya"/>
+        <a:font script="Thaa" typeface="MV Boli"/>
+        <a:font script="Deva" typeface="Mangal"/>
+        <a:font script="Telu" typeface="Gautami"/>
+        <a:font script="Taml" typeface="Latha"/>
+        <a:font script="Syrc" typeface="Estrangelo Edessa"/>
+        <a:font script="Orya" typeface="Kalinga"/>
+        <a:font script="Mlym" typeface="Kartika"/>
+        <a:font script="Laoo" typeface="DokChampa"/>
+        <a:font script="Sinh" typeface="Iskoola Pota"/>
+        <a:font script="Mong" typeface="Mongolian Baiti"/>
+        <a:font script="Viet" typeface="Times New Roman"/>
+        <a:font script="Uigh" typeface="Microsoft Uighur"/>
+        <a:font script="Geor" typeface="Sylfaen"/>
+        <a:font script="Armn" typeface="Arial"/>
+        <a:font script="Bugi" typeface="Leelawadee UI"/>
+        <a:font script="Bopo" typeface="Microsoft JhengHei"/>
+        <a:font script="Java" typeface="Javanese Text"/>
+        <a:font script="Lisu" typeface="Segoe UI"/>
+        <a:font script="Mymr" typeface="Myanmar Text"/>
+        <a:font script="Nkoo" typeface="Ebrima"/>
+        <a:font script="Olck" typeface="Nirmala UI"/>
+        <a:font script="Osma" typeface="Ebrima"/>
+        <a:font script="Phag" typeface="Phagspa"/>
+        <a:font script="Syrn" typeface="Estrangelo Edessa"/>
+        <a:font script="Syrj" typeface="Estrangelo Edessa"/>
+        <a:font script="Syre" typeface="Estrangelo Edessa"/>
+        <a:font script="Sora" typeface="Nirmala UI"/>
+        <a:font script="Tale" typeface="Microsoft Tai Le"/>
+        <a:font script="Talu" typeface="Microsoft New Tai Lue"/>
+        <a:font script="Tfng" typeface="Ebrima"/>
+      </a:majorFont>
+      <a:minorFont>
+        <a:latin typeface="等线" panose="02110004020202020204"/>
+        <a:ea typeface=""/>
+        <a:cs typeface=""/>
+        <a:font script="Jpan" typeface="游ゴシック"/>
+        <a:font script="Hang" typeface="맑은 고딕"/>
+        <a:font script="Hans" typeface="等线"/>
+        <a:font script="Hant" typeface="新細明體"/>
+        <a:font script="Arab" typeface="Arial"/>
+        <a:font script="Hebr" typeface="Arial"/>
+        <a:font script="Thai" typeface="Cordia New"/>
+        <a:font script="Ethi" typeface="Nyala"/>
+        <a:font script="Beng" typeface="Vrinda"/>
+        <a:font script="Gujr" typeface="Shruti"/>
+        <a:font script="Khmr" typeface="DaunPenh"/>
+        <a:font script="Knda" typeface="Tunga"/>
+        <a:font script="Guru" typeface="Raavi"/>
+        <a:font script="Cans" typeface="Euphemia"/>
+        <a:font script="Cher" typeface="Plantagenet Cherokee"/>
+        <a:font script="Yiii" typeface="Microsoft Yi Baiti"/>
+        <a:font script="Tibt" typeface="Microsoft Himalaya"/>
+        <a:font script="Thaa" typeface="MV Boli"/>
+        <a:font script="Deva" typeface="Mangal"/>
+        <a:font script="Telu" typeface="Gautami"/>
+        <a:font script="Taml" typeface="Latha"/>
+        <a:font script="Syrc" typeface="Estrangelo Edessa"/>
+        <a:font script="Orya" typeface="Kalinga"/>
+        <a:font script="Mlym" typeface="Kartika"/>
+        <a:font script="Laoo" typeface="DokChampa"/>
+        <a:font script="Sinh" typeface="Iskoola Pota"/>
+        <a:font script="Mong" typeface="Mongolian Baiti"/>
+        <a:font script="Viet" typeface="Arial"/>
+        <a:font script="Uigh" typeface="Microsoft Uighur"/>
+        <a:font script="Geor" typeface="Sylfaen"/>
+        <a:font script="Armn" typeface="Arial"/>
+        <a:font script="Bugi" typeface="Leelawadee UI"/>
+        <a:font script="Bopo" typeface="Microsoft JhengHei"/>
+        <a:font script="Java" typeface="Javanese Text"/>
+        <a:font script="Lisu" typeface="Segoe UI"/>
+        <a:font script="Mymr" typeface="Myanmar Text"/>
+        <a:font script="Nkoo" typeface="Ebrima"/>
+        <a:font script="Olck" typeface="Nirmala UI"/>
+        <a:font script="Osma" typeface="Ebrima"/>
+        <a:font script="Phag" typeface="Phagspa"/>
+        <a:font script="Syrn" typeface="Estrangelo Edessa"/>
+        <a:font script="Syrj" typeface="Estrangelo Edessa"/>
+        <a:font script="Syre" typeface="Estrangelo Edessa"/>
+        <a:font script="Sora" typeface="Nirmala UI"/>
+        <a:font script="Tale" typeface="Microsoft Tai Le"/>
+        <a:font script="Talu" typeface="Microsoft New Tai Lue"/>
+        <a:font script="Tfng" typeface="Ebrima"/>
+      </a:minorFont>
+    </a:fontScheme>
+    <a:fmtScheme name="Office">
+      <a:fillStyleLst>
+        <a:solidFill>
+          <a:schemeClr val="phClr"/>
+        </a:solidFill>
+        <a:gradFill rotWithShape="1">
+          <a:gsLst>
+            <a:gs pos="0">
+              <a:schemeClr val="phClr">
+                <a:lumMod val="110000"/>
+                <a:satMod val="105000"/>
+                <a:tint val="67000"/>
+              </a:schemeClr>
+            </a:gs>
+            <a:gs pos="50000">
+              <a:schemeClr val="phClr">
+                <a:lumMod val="105000"/>
+                <a:satMod val="103000"/>
+                <a:tint val="73000"/>
+              </a:schemeClr>
+            </a:gs>
+            <a:gs pos="100000">
+              <a:schemeClr val="phClr">
+                <a:lumMod val="105000"/>
+                <a:satMod val="109000"/>
+                <a:tint val="81000"/>
+              </a:schemeClr>
+            </a:gs>
+          </a:gsLst>
+          <a:lin ang="5400000" scaled="0"/>
+        </a:gradFill>
+        <a:gradFill rotWithShape="1">
+          <a:gsLst>
+            <a:gs pos="0">
+              <a:schemeClr val="phClr">
+                <a:satMod val="103000"/>
+                <a:lumMod val="102000"/>
+                <a:tint val="94000"/>
+              </a:schemeClr>
+            </a:gs>
+            <a:gs pos="50000">
+              <a:schemeClr val="phClr">
+                <a:satMod val="110000"/>
+                <a:lumMod val="100000"/>
+                <a:shade val="100000"/>
+              </a:schemeClr>
+            </a:gs>
+            <a:gs pos="100000">
+              <a:schemeClr val="phClr">
+                <a:lumMod val="99000"/>
+                <a:satMod val="120000"/>
+                <a:shade val="78000"/>
+              </a:schemeClr>
+            </a:gs>
+          </a:gsLst>
+          <a:lin ang="5400000" scaled="0"/>
+        </a:gradFill>
+      </a:fillStyleLst>
+      <a:lnStyleLst>
+        <a:ln w="12700" cap="flat" cmpd="sng" algn="ctr">
+          <a:solidFill>
+            <a:schemeClr val="phClr"/>
+          </a:solidFill>
+          <a:prstDash val="solid"/>
+          <a:miter lim="800000"/>
+        </a:ln>
+        <a:ln w="19050" cap="flat" cmpd="sng" algn="ctr">
+          <a:solidFill>
+            <a:schemeClr val="phClr"/>
+          </a:solidFill>
+          <a:prstDash val="solid"/>
+          <a:miter lim="800000"/>
+        </a:ln>
+        <a:ln w="25400" cap="flat" cmpd="sng" algn="ctr">
+          <a:solidFill>
+            <a:schemeClr val="phClr"/>
+          </a:solidFill>
+          <a:prstDash val="solid"/>
+          <a:miter lim="800000"/>
+        </a:ln>
+      </a:lnStyleLst>
+      <a:effectStyleLst>
+        <a:effectStyle>
+          <a:effectLst/>
+        </a:effectStyle>
+        <a:effectStyle>
+          <a:effectLst/>
+        </a:effectStyle>
+        <a:effectStyle>
+          <a:effectLst>
+            <a:outerShdw blurRad="57150" dist="19050" dir="5400000" algn="ctr" rotWithShape="0">
+              <a:srgbClr val="000000">
+                <a:alpha val="63000"/>
+              </a:srgbClr>
+            </a:outerShdw>
+          </a:effectLst>
+        </a:effectStyle>
+      </a:effectStyleLst>
+      <a:bgFillStyleLst>
+        <a:solidFill>
+          <a:schemeClr val="phClr"/>
+        </a:solidFill>
+        <a:solidFill>
+          <a:schemeClr val="phClr">
+            <a:tint val="95000"/>
+            <a:satMod val="170000"/>
+          </a:schemeClr>
+        </a:solidFill>
+        <a:gradFill rotWithShape="1">
+          <a:gsLst>
+            <a:gs pos="0">
+              <a:schemeClr val="phClr">
+                <a:tint val="93000"/>
+                <a:satMod val="150000"/>
+                <a:shade val="98000"/>
+                <a:lumMod val="102000"/>
+              </a:schemeClr>
+            </a:gs>
+            <a:gs pos="50000">
+              <a:schemeClr val="phClr">
+                <a:tint val="98000"/>
+                <a:satMod val="130000"/>
+                <a:shade val="90000"/>
+                <a:lumMod val="103000"/>
+              </a:schemeClr>
+            </a:gs>
+            <a:gs pos="100000">
+              <a:schemeClr val="phClr">
+                <a:shade val="63000"/>
+                <a:satMod val="120000"/>
+              </a:schemeClr>
+            </a:gs>
+          </a:gsLst>
+          <a:lin ang="5400000" scaled="0"/>
+        </a:gradFill>
+      </a:bgFillStyleLst>
+    </a:fmtScheme>
+  </a:themeElements>
+  <a:objectDefaults>
+    <a:lnDef>
+      <a:spPr/>
+      <a:bodyPr/>
+      <a:lstStyle/>
+      <a:style>
+        <a:lnRef idx="2">
+          <a:schemeClr val="accent1"/>
+        </a:lnRef>
+        <a:fillRef idx="0">
+          <a:schemeClr val="accent1"/>
+        </a:fillRef>
+        <a:effectRef idx="1">
+          <a:schemeClr val="accent1"/>
+        </a:effectRef>
+        <a:fontRef idx="minor">
+          <a:schemeClr val="tx1"/>
+        </a:fontRef>
+      </a:style>
+    </a:lnDef>
+  </a:objectDefaults>
+  <a:extraClrSchemeLst/>
+  <a:extLst>
+    <a:ext uri="{05A4C25C-085E-4340-85A3-A5531E510DB2}">
+      <thm15:themeFamily xmlns:thm15="http://schemas.microsoft.com/office/thememl/2012/main" name="Office Theme" id="{2E142A2C-CD16-42D6-873A-C26D2A0506FA}" vid="{1BDDFF52-6CD6-40A5-AB3C-68EB2F1E4D0A}"/>
+    </a:ext>
+  </a:extLst>
+</a:theme>
 </file>